--- a/ppt/02_演算法設計_含遊戲例圖.pptx
+++ b/ppt/02_演算法設計_含遊戲例圖.pptx
@@ -169,9 +169,9 @@
           </c:tx>
           <c:spPr>
             <a:solidFill>
-              <a:schemeClr val="accent1">
-                <a:alpha val="70000"/>
-              </a:schemeClr>
+              <a:srgbClr val="4F81BD">
+                <a:alpha val="70196"/>
+              </a:srgbClr>
             </a:solidFill>
             <a:ln>
               <a:noFill/>
@@ -255,9 +255,9 @@
           </c:tx>
           <c:spPr>
             <a:solidFill>
-              <a:schemeClr val="accent2">
-                <a:alpha val="70000"/>
-              </a:schemeClr>
+              <a:srgbClr val="C0504D">
+                <a:alpha val="70196"/>
+              </a:srgbClr>
             </a:solidFill>
             <a:ln>
               <a:noFill/>
@@ -659,7 +659,7 @@
           <a:p>
             <a:fld id="{5BCAD085-E8A6-8845-BD4E-CB4CCA059FC4}" type="datetimeFigureOut">
               <a:rPr lang="en-US" smtClean="0"/>
-              <a:t>6/16/2026</a:t>
+              <a:t>6/17/2026</a:t>
             </a:fld>
             <a:endParaRPr lang="en-US"/>
           </a:p>
@@ -827,7 +827,7 @@
           <a:p>
             <a:fld id="{5BCAD085-E8A6-8845-BD4E-CB4CCA059FC4}" type="datetimeFigureOut">
               <a:rPr lang="en-US" smtClean="0"/>
-              <a:t>6/16/2026</a:t>
+              <a:t>6/17/2026</a:t>
             </a:fld>
             <a:endParaRPr lang="en-US"/>
           </a:p>
@@ -1005,7 +1005,7 @@
           <a:p>
             <a:fld id="{5BCAD085-E8A6-8845-BD4E-CB4CCA059FC4}" type="datetimeFigureOut">
               <a:rPr lang="en-US" smtClean="0"/>
-              <a:t>6/16/2026</a:t>
+              <a:t>6/17/2026</a:t>
             </a:fld>
             <a:endParaRPr lang="en-US"/>
           </a:p>
@@ -1173,7 +1173,7 @@
           <a:p>
             <a:fld id="{5BCAD085-E8A6-8845-BD4E-CB4CCA059FC4}" type="datetimeFigureOut">
               <a:rPr lang="en-US" smtClean="0"/>
-              <a:t>6/16/2026</a:t>
+              <a:t>6/17/2026</a:t>
             </a:fld>
             <a:endParaRPr lang="en-US"/>
           </a:p>
@@ -1418,7 +1418,7 @@
           <a:p>
             <a:fld id="{5BCAD085-E8A6-8845-BD4E-CB4CCA059FC4}" type="datetimeFigureOut">
               <a:rPr lang="en-US" smtClean="0"/>
-              <a:t>6/16/2026</a:t>
+              <a:t>6/17/2026</a:t>
             </a:fld>
             <a:endParaRPr lang="en-US"/>
           </a:p>
@@ -1703,7 +1703,7 @@
           <a:p>
             <a:fld id="{5BCAD085-E8A6-8845-BD4E-CB4CCA059FC4}" type="datetimeFigureOut">
               <a:rPr lang="en-US" smtClean="0"/>
-              <a:t>6/16/2026</a:t>
+              <a:t>6/17/2026</a:t>
             </a:fld>
             <a:endParaRPr lang="en-US"/>
           </a:p>
@@ -2122,7 +2122,7 @@
           <a:p>
             <a:fld id="{5BCAD085-E8A6-8845-BD4E-CB4CCA059FC4}" type="datetimeFigureOut">
               <a:rPr lang="en-US" smtClean="0"/>
-              <a:t>6/16/2026</a:t>
+              <a:t>6/17/2026</a:t>
             </a:fld>
             <a:endParaRPr lang="en-US"/>
           </a:p>
@@ -2239,7 +2239,7 @@
           <a:p>
             <a:fld id="{5BCAD085-E8A6-8845-BD4E-CB4CCA059FC4}" type="datetimeFigureOut">
               <a:rPr lang="en-US" smtClean="0"/>
-              <a:t>6/16/2026</a:t>
+              <a:t>6/17/2026</a:t>
             </a:fld>
             <a:endParaRPr lang="en-US"/>
           </a:p>
@@ -2334,7 +2334,7 @@
           <a:p>
             <a:fld id="{5BCAD085-E8A6-8845-BD4E-CB4CCA059FC4}" type="datetimeFigureOut">
               <a:rPr lang="en-US" smtClean="0"/>
-              <a:t>6/16/2026</a:t>
+              <a:t>6/17/2026</a:t>
             </a:fld>
             <a:endParaRPr lang="en-US"/>
           </a:p>
@@ -2609,7 +2609,7 @@
           <a:p>
             <a:fld id="{5BCAD085-E8A6-8845-BD4E-CB4CCA059FC4}" type="datetimeFigureOut">
               <a:rPr lang="en-US" smtClean="0"/>
-              <a:t>6/16/2026</a:t>
+              <a:t>6/17/2026</a:t>
             </a:fld>
             <a:endParaRPr lang="en-US"/>
           </a:p>
@@ -2861,7 +2861,7 @@
           <a:p>
             <a:fld id="{5BCAD085-E8A6-8845-BD4E-CB4CCA059FC4}" type="datetimeFigureOut">
               <a:rPr lang="en-US" smtClean="0"/>
-              <a:t>6/16/2026</a:t>
+              <a:t>6/17/2026</a:t>
             </a:fld>
             <a:endParaRPr lang="en-US"/>
           </a:p>
@@ -3072,7 +3072,7 @@
           <a:p>
             <a:fld id="{5BCAD085-E8A6-8845-BD4E-CB4CCA059FC4}" type="datetimeFigureOut">
               <a:rPr lang="en-US" smtClean="0"/>
-              <a:t>6/16/2026</a:t>
+              <a:t>6/17/2026</a:t>
             </a:fld>
             <a:endParaRPr lang="en-US"/>
           </a:p>
@@ -3583,7 +3583,7 @@
           <a:lstStyle/>
           <a:p>
             <a:pPr algn="ctr"/>
-            <a:endParaRPr/>
+            <a:endParaRPr dirty="0"/>
           </a:p>
         </p:txBody>
       </p:sp>
@@ -4033,7 +4033,7 @@
           <a:p>
             <a:pPr algn="l"/>
             <a:r>
-              <a:rPr sz="1700" b="0" i="0">
+              <a:rPr sz="1700" b="0" i="0" dirty="0">
                 <a:solidFill>
                   <a:srgbClr val="C77DFF"/>
                 </a:solidFill>
@@ -4052,451 +4052,62 @@
         </p:nvSpPr>
         <p:spPr>
           <a:xfrm>
-            <a:off x="365760" y="2788920"/>
-            <a:ext cx="8412480" cy="365760"/>
-          </a:xfrm>
-          <a:prstGeom prst="rect">
-            <a:avLst/>
-          </a:prstGeom>
-          <a:noFill/>
-        </p:spPr>
-        <p:txBody>
-          <a:bodyPr wrap="square">
-            <a:spAutoFit/>
-          </a:bodyPr>
-          <a:lstStyle/>
-          <a:p>
-            <a:pPr algn="l"/>
-            <a:r>
-              <a:rPr sz="1100" b="0" i="0">
+            <a:off x="365760" y="4318107"/>
+            <a:ext cx="8412480" cy="261610"/>
+          </a:xfrm>
+          <a:prstGeom prst="rect">
+            <a:avLst/>
+          </a:prstGeom>
+          <a:noFill/>
+        </p:spPr>
+        <p:txBody>
+          <a:bodyPr wrap="square">
+            <a:spAutoFit/>
+          </a:bodyPr>
+          <a:lstStyle/>
+          <a:p>
+            <a:r>
+              <a:rPr lang="en-US" sz="1100" b="0" i="0" dirty="0">
                 <a:solidFill>
                   <a:srgbClr val="8B80A8"/>
                 </a:solidFill>
                 <a:latin typeface="Calibri"/>
               </a:rPr>
-              <a:t>Project Motivation  ·  System Architecture  ·  Technologies Used  ·  Experimental Results  ·  Future Improvements</a:t>
-            </a:r>
-          </a:p>
-        </p:txBody>
-      </p:sp>
-      <p:sp>
-        <p:nvSpPr>
-          <p:cNvPr id="17" name="Rectangle 16"/>
-          <p:cNvSpPr/>
-          <p:nvPr/>
-        </p:nvSpPr>
-        <p:spPr>
-          <a:xfrm>
-            <a:off x="365760" y="3337560"/>
-            <a:ext cx="1874519" cy="804672"/>
-          </a:xfrm>
-          <a:prstGeom prst="rect">
-            <a:avLst/>
-          </a:prstGeom>
-          <a:solidFill>
-            <a:srgbClr val="1A1230"/>
-          </a:solidFill>
-          <a:ln>
-            <a:noFill/>
-          </a:ln>
-        </p:spPr>
-        <p:style>
-          <a:lnRef idx="1">
-            <a:schemeClr val="accent1"/>
-          </a:lnRef>
-          <a:fillRef idx="3">
-            <a:schemeClr val="accent1"/>
-          </a:fillRef>
-          <a:effectRef idx="2">
-            <a:schemeClr val="accent1"/>
-          </a:effectRef>
-          <a:fontRef idx="minor">
-            <a:schemeClr val="lt1"/>
-          </a:fontRef>
-        </p:style>
-        <p:txBody>
-          <a:bodyPr rtlCol="0" anchor="ctr"/>
-          <a:lstStyle/>
-          <a:p>
-            <a:pPr algn="ctr"/>
-            <a:endParaRPr/>
-          </a:p>
-        </p:txBody>
-      </p:sp>
-      <p:sp>
-        <p:nvSpPr>
-          <p:cNvPr id="18" name="TextBox 17"/>
-          <p:cNvSpPr txBox="1"/>
-          <p:nvPr/>
-        </p:nvSpPr>
-        <p:spPr>
-          <a:xfrm>
-            <a:off x="365760" y="3374136"/>
-            <a:ext cx="1874519" cy="420624"/>
-          </a:xfrm>
-          <a:prstGeom prst="rect">
-            <a:avLst/>
-          </a:prstGeom>
-          <a:noFill/>
-        </p:spPr>
-        <p:txBody>
-          <a:bodyPr wrap="square">
-            <a:spAutoFit/>
-          </a:bodyPr>
-          <a:lstStyle/>
-          <a:p>
-            <a:pPr algn="ctr"/>
-            <a:r>
-              <a:rPr sz="2200" b="1" i="0">
-                <a:solidFill>
-                  <a:srgbClr val="00F5D4"/>
+              <a:t>1113405032 </a:t>
+            </a:r>
+            <a:r>
+              <a:rPr lang="en-US" sz="1100" dirty="0" err="1">
+                <a:solidFill>
+                  <a:srgbClr val="8B80A8"/>
                 </a:solidFill>
                 <a:latin typeface="Calibri"/>
               </a:rPr>
-              <a:t>8</a:t>
-            </a:r>
-          </a:p>
-        </p:txBody>
-      </p:sp>
-      <p:sp>
-        <p:nvSpPr>
-          <p:cNvPr id="19" name="TextBox 18"/>
-          <p:cNvSpPr txBox="1"/>
-          <p:nvPr/>
-        </p:nvSpPr>
-        <p:spPr>
-          <a:xfrm>
-            <a:off x="365760" y="3813048"/>
-            <a:ext cx="1874519" cy="274320"/>
-          </a:xfrm>
-          <a:prstGeom prst="rect">
-            <a:avLst/>
-          </a:prstGeom>
-          <a:noFill/>
-        </p:spPr>
-        <p:txBody>
-          <a:bodyPr wrap="square">
-            <a:spAutoFit/>
-          </a:bodyPr>
-          <a:lstStyle/>
-          <a:p>
-            <a:pPr algn="ctr"/>
-            <a:r>
-              <a:rPr sz="1000" b="0" i="0">
+              <a:t>資工二甲</a:t>
+            </a:r>
+            <a:r>
+              <a:rPr lang="en-US" sz="1100" dirty="0">
                 <a:solidFill>
                   <a:srgbClr val="8B80A8"/>
                 </a:solidFill>
                 <a:latin typeface="Calibri"/>
               </a:rPr>
-              <a:t>彈幕演算法</a:t>
-            </a:r>
-          </a:p>
-        </p:txBody>
-      </p:sp>
-      <p:sp>
-        <p:nvSpPr>
-          <p:cNvPr id="20" name="Rectangle 19"/>
-          <p:cNvSpPr/>
-          <p:nvPr/>
-        </p:nvSpPr>
-        <p:spPr>
-          <a:xfrm>
-            <a:off x="2514600" y="3337560"/>
-            <a:ext cx="1874519" cy="804672"/>
-          </a:xfrm>
-          <a:prstGeom prst="rect">
-            <a:avLst/>
-          </a:prstGeom>
-          <a:solidFill>
-            <a:srgbClr val="1A1230"/>
-          </a:solidFill>
-          <a:ln>
-            <a:noFill/>
-          </a:ln>
-        </p:spPr>
-        <p:style>
-          <a:lnRef idx="1">
-            <a:schemeClr val="accent1"/>
-          </a:lnRef>
-          <a:fillRef idx="3">
-            <a:schemeClr val="accent1"/>
-          </a:fillRef>
-          <a:effectRef idx="2">
-            <a:schemeClr val="accent1"/>
-          </a:effectRef>
-          <a:fontRef idx="minor">
-            <a:schemeClr val="lt1"/>
-          </a:fontRef>
-        </p:style>
-        <p:txBody>
-          <a:bodyPr rtlCol="0" anchor="ctr"/>
-          <a:lstStyle/>
-          <a:p>
-            <a:pPr algn="ctr"/>
-            <a:endParaRPr/>
-          </a:p>
-        </p:txBody>
-      </p:sp>
-      <p:sp>
-        <p:nvSpPr>
-          <p:cNvPr id="21" name="TextBox 20"/>
-          <p:cNvSpPr txBox="1"/>
-          <p:nvPr/>
-        </p:nvSpPr>
-        <p:spPr>
-          <a:xfrm>
-            <a:off x="2514600" y="3374136"/>
-            <a:ext cx="1874519" cy="420624"/>
-          </a:xfrm>
-          <a:prstGeom prst="rect">
-            <a:avLst/>
-          </a:prstGeom>
-          <a:noFill/>
-        </p:spPr>
-        <p:txBody>
-          <a:bodyPr wrap="square">
-            <a:spAutoFit/>
-          </a:bodyPr>
-          <a:lstStyle/>
-          <a:p>
-            <a:pPr algn="ctr"/>
-            <a:r>
-              <a:rPr sz="2200" b="1" i="0">
-                <a:solidFill>
-                  <a:srgbClr val="00F5D4"/>
+              <a:t> </a:t>
+            </a:r>
+            <a:r>
+              <a:rPr lang="en-US" sz="1100" b="0" i="0" dirty="0" err="1">
+                <a:solidFill>
+                  <a:srgbClr val="8B80A8"/>
                 </a:solidFill>
                 <a:latin typeface="Calibri"/>
               </a:rPr>
-              <a:t>4</a:t>
-            </a:r>
-          </a:p>
-        </p:txBody>
-      </p:sp>
-      <p:sp>
-        <p:nvSpPr>
-          <p:cNvPr id="22" name="TextBox 21"/>
-          <p:cNvSpPr txBox="1"/>
-          <p:nvPr/>
-        </p:nvSpPr>
-        <p:spPr>
-          <a:xfrm>
-            <a:off x="2514600" y="3813048"/>
-            <a:ext cx="1874519" cy="274320"/>
-          </a:xfrm>
-          <a:prstGeom prst="rect">
-            <a:avLst/>
-          </a:prstGeom>
-          <a:noFill/>
-        </p:spPr>
-        <p:txBody>
-          <a:bodyPr wrap="square">
-            <a:spAutoFit/>
-          </a:bodyPr>
-          <a:lstStyle/>
-          <a:p>
-            <a:pPr algn="ctr"/>
-            <a:r>
-              <a:rPr sz="1000" b="0" i="0">
-                <a:solidFill>
-                  <a:srgbClr val="8B80A8"/>
-                </a:solidFill>
-                <a:latin typeface="Calibri"/>
-              </a:rPr>
-              <a:t>運動類型</a:t>
-            </a:r>
-          </a:p>
-        </p:txBody>
-      </p:sp>
-      <p:sp>
-        <p:nvSpPr>
-          <p:cNvPr id="23" name="Rectangle 22"/>
-          <p:cNvSpPr/>
-          <p:nvPr/>
-        </p:nvSpPr>
-        <p:spPr>
-          <a:xfrm>
-            <a:off x="4663440" y="3337560"/>
-            <a:ext cx="1874519" cy="804672"/>
-          </a:xfrm>
-          <a:prstGeom prst="rect">
-            <a:avLst/>
-          </a:prstGeom>
-          <a:solidFill>
-            <a:srgbClr val="1A1230"/>
-          </a:solidFill>
-          <a:ln>
-            <a:noFill/>
-          </a:ln>
-        </p:spPr>
-        <p:style>
-          <a:lnRef idx="1">
-            <a:schemeClr val="accent1"/>
-          </a:lnRef>
-          <a:fillRef idx="3">
-            <a:schemeClr val="accent1"/>
-          </a:fillRef>
-          <a:effectRef idx="2">
-            <a:schemeClr val="accent1"/>
-          </a:effectRef>
-          <a:fontRef idx="minor">
-            <a:schemeClr val="lt1"/>
-          </a:fontRef>
-        </p:style>
-        <p:txBody>
-          <a:bodyPr rtlCol="0" anchor="ctr"/>
-          <a:lstStyle/>
-          <a:p>
-            <a:pPr algn="ctr"/>
-            <a:endParaRPr/>
-          </a:p>
-        </p:txBody>
-      </p:sp>
-      <p:sp>
-        <p:nvSpPr>
-          <p:cNvPr id="24" name="TextBox 23"/>
-          <p:cNvSpPr txBox="1"/>
-          <p:nvPr/>
-        </p:nvSpPr>
-        <p:spPr>
-          <a:xfrm>
-            <a:off x="4663440" y="3374136"/>
-            <a:ext cx="1874519" cy="420624"/>
-          </a:xfrm>
-          <a:prstGeom prst="rect">
-            <a:avLst/>
-          </a:prstGeom>
-          <a:noFill/>
-        </p:spPr>
-        <p:txBody>
-          <a:bodyPr wrap="square">
-            <a:spAutoFit/>
-          </a:bodyPr>
-          <a:lstStyle/>
-          <a:p>
-            <a:pPr algn="ctr"/>
-            <a:r>
-              <a:rPr sz="2200" b="1" i="0">
-                <a:solidFill>
-                  <a:srgbClr val="00F5D4"/>
-                </a:solidFill>
-                <a:latin typeface="Calibri"/>
-              </a:rPr>
-              <a:t>5</a:t>
-            </a:r>
-          </a:p>
-        </p:txBody>
-      </p:sp>
-      <p:sp>
-        <p:nvSpPr>
-          <p:cNvPr id="25" name="TextBox 24"/>
-          <p:cNvSpPr txBox="1"/>
-          <p:nvPr/>
-        </p:nvSpPr>
-        <p:spPr>
-          <a:xfrm>
-            <a:off x="4663440" y="3813048"/>
-            <a:ext cx="1874519" cy="274320"/>
-          </a:xfrm>
-          <a:prstGeom prst="rect">
-            <a:avLst/>
-          </a:prstGeom>
-          <a:noFill/>
-        </p:spPr>
-        <p:txBody>
-          <a:bodyPr wrap="square">
-            <a:spAutoFit/>
-          </a:bodyPr>
-          <a:lstStyle/>
-          <a:p>
-            <a:pPr algn="ctr"/>
-            <a:r>
-              <a:rPr sz="1000" b="0" i="0">
-                <a:solidFill>
-                  <a:srgbClr val="8B80A8"/>
-                </a:solidFill>
-                <a:latin typeface="Calibri"/>
-              </a:rPr>
-              <a:t>技能樹</a:t>
-            </a:r>
-          </a:p>
-        </p:txBody>
-      </p:sp>
-      <p:sp>
-        <p:nvSpPr>
-          <p:cNvPr id="26" name="Rectangle 25"/>
-          <p:cNvSpPr/>
-          <p:nvPr/>
-        </p:nvSpPr>
-        <p:spPr>
-          <a:xfrm>
-            <a:off x="6812280" y="3337560"/>
-            <a:ext cx="1874519" cy="804672"/>
-          </a:xfrm>
-          <a:prstGeom prst="rect">
-            <a:avLst/>
-          </a:prstGeom>
-          <a:solidFill>
-            <a:srgbClr val="1A1230"/>
-          </a:solidFill>
-          <a:ln>
-            <a:noFill/>
-          </a:ln>
-        </p:spPr>
-        <p:style>
-          <a:lnRef idx="1">
-            <a:schemeClr val="accent1"/>
-          </a:lnRef>
-          <a:fillRef idx="3">
-            <a:schemeClr val="accent1"/>
-          </a:fillRef>
-          <a:effectRef idx="2">
-            <a:schemeClr val="accent1"/>
-          </a:effectRef>
-          <a:fontRef idx="minor">
-            <a:schemeClr val="lt1"/>
-          </a:fontRef>
-        </p:style>
-        <p:txBody>
-          <a:bodyPr rtlCol="0" anchor="ctr"/>
-          <a:lstStyle/>
-          <a:p>
-            <a:pPr algn="ctr"/>
-            <a:endParaRPr/>
-          </a:p>
-        </p:txBody>
-      </p:sp>
-      <p:sp>
-        <p:nvSpPr>
-          <p:cNvPr id="27" name="TextBox 26"/>
-          <p:cNvSpPr txBox="1"/>
-          <p:nvPr/>
-        </p:nvSpPr>
-        <p:spPr>
-          <a:xfrm>
-            <a:off x="6812280" y="3374136"/>
-            <a:ext cx="1874519" cy="420624"/>
-          </a:xfrm>
-          <a:prstGeom prst="rect">
-            <a:avLst/>
-          </a:prstGeom>
-          <a:noFill/>
-        </p:spPr>
-        <p:txBody>
-          <a:bodyPr wrap="square">
-            <a:spAutoFit/>
-          </a:bodyPr>
-          <a:lstStyle/>
-          <a:p>
-            <a:pPr algn="ctr"/>
-            <a:r>
-              <a:rPr sz="2200" b="1" i="0">
-                <a:solidFill>
-                  <a:srgbClr val="00F5D4"/>
-                </a:solidFill>
-                <a:latin typeface="Calibri"/>
-              </a:rPr>
-              <a:t>Lv 1-99</a:t>
-            </a:r>
+              <a:t>翁祺展</a:t>
+            </a:r>
+            <a:endParaRPr sz="1100" b="0" i="0" dirty="0">
+              <a:solidFill>
+                <a:srgbClr val="8B80A8"/>
+              </a:solidFill>
+              <a:latin typeface="Calibri"/>
+            </a:endParaRPr>
           </a:p>
         </p:txBody>
       </p:sp>
@@ -4509,29 +4120,26 @@
         <p:spPr>
           <a:xfrm>
             <a:off x="6812280" y="3813048"/>
-            <a:ext cx="1874519" cy="274320"/>
-          </a:xfrm>
-          <a:prstGeom prst="rect">
-            <a:avLst/>
-          </a:prstGeom>
-          <a:noFill/>
-        </p:spPr>
-        <p:txBody>
-          <a:bodyPr wrap="square">
-            <a:spAutoFit/>
-          </a:bodyPr>
-          <a:lstStyle/>
-          <a:p>
-            <a:pPr algn="ctr"/>
-            <a:r>
-              <a:rPr sz="1000" b="0" i="0">
-                <a:solidFill>
-                  <a:srgbClr val="8B80A8"/>
-                </a:solidFill>
-                <a:latin typeface="Calibri"/>
-              </a:rPr>
-              <a:t>EXP 系統</a:t>
-            </a:r>
+            <a:ext cx="1874519" cy="246221"/>
+          </a:xfrm>
+          <a:prstGeom prst="rect">
+            <a:avLst/>
+          </a:prstGeom>
+          <a:noFill/>
+        </p:spPr>
+        <p:txBody>
+          <a:bodyPr wrap="square">
+            <a:spAutoFit/>
+          </a:bodyPr>
+          <a:lstStyle/>
+          <a:p>
+            <a:pPr algn="ctr"/>
+            <a:endParaRPr sz="1000" b="0" i="0" dirty="0">
+              <a:solidFill>
+                <a:srgbClr val="8B80A8"/>
+              </a:solidFill>
+              <a:latin typeface="Calibri"/>
+            </a:endParaRPr>
           </a:p>
         </p:txBody>
       </p:sp>
@@ -6722,7 +6330,7 @@
           <a:p>
             <a:pPr algn="ctr"/>
             <a:r>
-              <a:rPr sz="1400" b="0" i="0">
+              <a:rPr sz="1400" b="0" i="0" dirty="0">
                 <a:solidFill>
                   <a:srgbClr val="F0EAF8"/>
                 </a:solidFill>
@@ -8503,7 +8111,7 @@
                 </a:solidFill>
                 <a:latin typeface="Calibri"/>
               </a:rPr>
-              <a:t>BulletPattern 為純靜態工具類（無實例化），Enemy 與 Boss 傳入參數即回傳 List&lt;Bullet&gt;，達成演算法複用與解耦。</a:t>
+              <a:t>BulletPattern 為純靜態工具類（無實例化），Enemy 與 Boss 傳入參數即回傳 List&lt;Bullet&gt;，達成演算法複用與解耦。　兩位具名 Boss：Commander Aurora、Engineer Chronos。</a:t>
             </a:r>
           </a:p>
         </p:txBody>
@@ -9905,7 +9513,7 @@
                 </a:solidFill>
                 <a:latin typeface="Courier New"/>
               </a:rPr>
-              <a:t>angle = lerp(angle, target, 0.05)</a:t>
+              <a:t>angle += clamp(target - angle, ±0.05)</a:t>
             </a:r>
           </a:p>
         </p:txBody>
@@ -10625,6 +10233,41 @@
                 <a:latin typeface="Calibri"/>
               </a:rPr>
               <a:t>蝴蝶型 8 字</a:t>
+            </a:r>
+          </a:p>
+        </p:txBody>
+      </p:sp>
+      <p:sp>
+        <p:nvSpPr>
+          <p:cNvPr id="53" name="TextBox 52"/>
+          <p:cNvSpPr txBox="1"/>
+          <p:nvPr/>
+        </p:nvSpPr>
+        <p:spPr>
+          <a:xfrm>
+            <a:off x="365760" y="4846320"/>
+            <a:ext cx="8412480" cy="256032"/>
+          </a:xfrm>
+          <a:prstGeom prst="rect">
+            <a:avLst/>
+          </a:prstGeom>
+          <a:noFill/>
+        </p:spPr>
+        <p:txBody>
+          <a:bodyPr wrap="square">
+            <a:spAutoFit/>
+          </a:bodyPr>
+          <a:lstStyle/>
+          <a:p>
+            <a:pPr algn="l"/>
+            <a:r>
+              <a:rPr sz="900" i="1">
+                <a:solidFill>
+                  <a:srgbClr val="8B80A8"/>
+                </a:solidFill>
+                <a:latin typeface="Calibri"/>
+              </a:rPr>
+              <a:t>＊以上 8 種為遊戲實際啟用；另有 aimFan / spinningRing / accelBurst / laserBarrage / sakuraPetal 共 5 種已實作、暫未啟用（BulletPattern 共 13 種）。</a:t>
             </a:r>
           </a:p>
         </p:txBody>
@@ -11688,7 +11331,7 @@
                 </a:solidFill>
                 <a:latin typeface="Courier New"/>
               </a:rPr>
-              <a:t>angle = lerp(a, target, 0.05)</a:t>
+              <a:t>angle += clamp(target - a, ±0.05)</a:t>
             </a:r>
           </a:p>
         </p:txBody>
@@ -13545,7 +13188,7 @@
                 </a:solidFill>
                 <a:latin typeface="Courier New"/>
               </a:rPr>
-              <a:t>5000 × (diff+1)</a:t>
+              <a:t>5000×(diff+1) 擊殺／100×(diff+1) 命中</a:t>
             </a:r>
           </a:p>
         </p:txBody>
@@ -14230,6 +13873,41 @@
                 <a:latin typeface="Courier New"/>
               </a:rPr>
               <a:t>graze_r × (1+lvl×0.1)</a:t>
+            </a:r>
+          </a:p>
+        </p:txBody>
+      </p:sp>
+      <p:sp>
+        <p:nvSpPr>
+          <p:cNvPr id="66" name="TextBox 65"/>
+          <p:cNvSpPr txBox="1"/>
+          <p:nvPr/>
+        </p:nvSpPr>
+        <p:spPr>
+          <a:xfrm>
+            <a:off x="365760" y="4937760"/>
+            <a:ext cx="4297680" cy="182880"/>
+          </a:xfrm>
+          <a:prstGeom prst="rect">
+            <a:avLst/>
+          </a:prstGeom>
+          <a:noFill/>
+        </p:spPr>
+        <p:txBody>
+          <a:bodyPr wrap="square">
+            <a:spAutoFit/>
+          </a:bodyPr>
+          <a:lstStyle/>
+          <a:p>
+            <a:pPr algn="l"/>
+            <a:r>
+              <a:rPr sz="850" i="1">
+                <a:solidFill>
+                  <a:srgbClr val="8B80A8"/>
+                </a:solidFill>
+                <a:latin typeface="Calibri"/>
+              </a:rPr>
+              <a:t>＊type 0–2 於遊戲即時運作；type 3（加速，可為負 accel）已實作，目前保留作擴充。</a:t>
             </a:r>
           </a:p>
         </p:txBody>
@@ -14956,7 +14634,7 @@
                 <a:latin typeface="Courier New"/>
               </a:rPr>
               <a:t>60 ≤ age &lt; 120
-vx *= 0.95</a:t>
+vx,vy *= 0.95</a:t>
             </a:r>
           </a:p>
         </p:txBody>
@@ -16314,6 +15992,41 @@
           </a:p>
         </p:txBody>
       </p:sp>
+      <p:sp>
+        <p:nvSpPr>
+          <p:cNvPr id="44" name="TextBox 43"/>
+          <p:cNvSpPr txBox="1"/>
+          <p:nvPr/>
+        </p:nvSpPr>
+        <p:spPr>
+          <a:xfrm>
+            <a:off x="365760" y="4846320"/>
+            <a:ext cx="5394960" cy="219456"/>
+          </a:xfrm>
+          <a:prstGeom prst="rect">
+            <a:avLst/>
+          </a:prstGeom>
+          <a:noFill/>
+        </p:spPr>
+        <p:txBody>
+          <a:bodyPr wrap="square">
+            <a:spAutoFit/>
+          </a:bodyPr>
+          <a:lstStyle/>
+          <a:p>
+            <a:pPr algn="l"/>
+            <a:r>
+              <a:rPr sz="900" i="1">
+                <a:solidFill>
+                  <a:srgbClr val="8B80A8"/>
+                </a:solidFill>
+                <a:latin typeface="Calibri"/>
+              </a:rPr>
+              <a:t>＊巡邏：x = entryX + sin(t)×40，y = entryY+60 + sin(t·½)×15；減速階段 vx、vy 同乘 0.95。</a:t>
+            </a:r>
+          </a:p>
+        </p:txBody>
+      </p:sp>
     </p:spTree>
   </p:cSld>
   <p:clrMapOvr>
@@ -17160,8 +16873,8 @@
         </p:nvSpPr>
         <p:spPr>
           <a:xfrm>
-            <a:off x="365760" y="4187952"/>
-            <a:ext cx="8412480" cy="347472"/>
+            <a:off x="0" y="4160520"/>
+            <a:ext cx="8412480" cy="553998"/>
           </a:xfrm>
           <a:prstGeom prst="rect">
             <a:avLst/>
@@ -17176,13 +16889,105 @@
           <a:p>
             <a:pPr algn="l"/>
             <a:r>
-              <a:rPr sz="850" b="0" i="1">
+              <a:rPr sz="1000" i="1" dirty="0" err="1">
                 <a:solidFill>
                   <a:srgbClr val="8B80A8"/>
                 </a:solidFill>
                 <a:latin typeface="Calibri"/>
               </a:rPr>
-              <a:t>難度公式：speedMult = (1.0 + difficulty×0.2)×0.65  |  Easy 0.65× / Normal 0.78× / Hard 0.91× / Lunatic 1.04×</a:t>
+              <a:t>難度公式</a:t>
+            </a:r>
+            <a:r>
+              <a:rPr sz="1000" i="1" dirty="0">
+                <a:solidFill>
+                  <a:srgbClr val="8B80A8"/>
+                </a:solidFill>
+                <a:latin typeface="Calibri"/>
+              </a:rPr>
+              <a:t>　</a:t>
+            </a:r>
+            <a:r>
+              <a:rPr sz="1000" i="1" dirty="0" err="1">
+                <a:solidFill>
+                  <a:srgbClr val="8B80A8"/>
+                </a:solidFill>
+                <a:latin typeface="Calibri"/>
+              </a:rPr>
+              <a:t>一般敵人</a:t>
+            </a:r>
+            <a:r>
+              <a:rPr sz="1000" i="1" dirty="0">
+                <a:solidFill>
+                  <a:srgbClr val="8B80A8"/>
+                </a:solidFill>
+                <a:latin typeface="Calibri"/>
+              </a:rPr>
+              <a:t>　</a:t>
+            </a:r>
+            <a:r>
+              <a:rPr sz="1000" i="1" dirty="0" err="1">
+                <a:solidFill>
+                  <a:srgbClr val="8B80A8"/>
+                </a:solidFill>
+                <a:latin typeface="Calibri"/>
+              </a:rPr>
+              <a:t>speedMult</a:t>
+            </a:r>
+            <a:r>
+              <a:rPr sz="1000" i="1" dirty="0">
+                <a:solidFill>
+                  <a:srgbClr val="8B80A8"/>
+                </a:solidFill>
+                <a:latin typeface="Calibri"/>
+              </a:rPr>
+              <a:t> = (1.0 + diff×0.2)×0.65 </a:t>
+            </a:r>
+            <a:endParaRPr lang="en-US" sz="1000" i="1" dirty="0">
+              <a:solidFill>
+                <a:srgbClr val="8B80A8"/>
+              </a:solidFill>
+              <a:latin typeface="Calibri"/>
+            </a:endParaRPr>
+          </a:p>
+          <a:p>
+            <a:pPr algn="l"/>
+            <a:r>
+              <a:rPr sz="1000" i="1" dirty="0">
+                <a:solidFill>
+                  <a:srgbClr val="8B80A8"/>
+                </a:solidFill>
+                <a:latin typeface="Calibri"/>
+              </a:rPr>
+              <a:t>→ Easy 0.65 / Normal 0.78 / Hard 0.91 / Lunatic 1.04</a:t>
+            </a:r>
+          </a:p>
+          <a:p>
+            <a:r>
+              <a:rPr sz="1000" i="1" dirty="0">
+                <a:solidFill>
+                  <a:srgbClr val="FEE440"/>
+                </a:solidFill>
+                <a:latin typeface="Calibri"/>
+              </a:rPr>
+              <a:t>　　　　　　Boss　　</a:t>
+            </a:r>
+            <a:r>
+              <a:rPr sz="1000" i="1" dirty="0" err="1">
+                <a:solidFill>
+                  <a:srgbClr val="FEE440"/>
+                </a:solidFill>
+                <a:latin typeface="Calibri"/>
+              </a:rPr>
+              <a:t>speedMult</a:t>
+            </a:r>
+            <a:r>
+              <a:rPr sz="1000" i="1" dirty="0">
+                <a:solidFill>
+                  <a:srgbClr val="FEE440"/>
+                </a:solidFill>
+                <a:latin typeface="Calibri"/>
+              </a:rPr>
+              <a:t> = (1.0 + diff×0.25)×0.65 → 0.65 / 0.81 / 0.97 / 1.14</a:t>
             </a:r>
           </a:p>
         </p:txBody>

--- a/ppt/02_演算法設計_含遊戲例圖.pptx
+++ b/ppt/02_演算法設計_含遊戲例圖.pptx
@@ -9,9 +9,12 @@
     <p:sldId id="257" r:id="rId3"/>
     <p:sldId id="258" r:id="rId4"/>
     <p:sldId id="259" r:id="rId5"/>
+    <p:sldId id="266" r:id="rId16"/>
+    <p:sldId id="267" r:id="rId17"/>
     <p:sldId id="264" r:id="rId6"/>
     <p:sldId id="265" r:id="rId7"/>
     <p:sldId id="260" r:id="rId8"/>
+    <p:sldId id="268" r:id="rId18"/>
     <p:sldId id="261" r:id="rId9"/>
     <p:sldId id="262" r:id="rId10"/>
     <p:sldId id="263" r:id="rId11"/>
@@ -5681,6 +5684,4437 @@
                 <a:latin typeface="Calibri"/>
               </a:rPr>
               <a:t>分散式狀態一致性演算法</a:t>
+            </a:r>
+          </a:p>
+        </p:txBody>
+      </p:sp>
+    </p:spTree>
+  </p:cSld>
+  <p:clrMapOvr>
+    <a:masterClrMapping/>
+  </p:clrMapOvr>
+</p:sld>
+</file>
+
+<file path=ppt/slides/slide11.xml><?xml version="1.0" encoding="utf-8"?>
+<p:sld xmlns:a="http://schemas.openxmlformats.org/drawingml/2006/main" xmlns:p="http://schemas.openxmlformats.org/presentationml/2006/main" xmlns:r="http://schemas.openxmlformats.org/officeDocument/2006/relationships">
+  <p:cSld>
+    <p:bg>
+      <p:bgPr>
+        <a:solidFill>
+          <a:srgbClr val="0F0A1E"/>
+        </a:solidFill>
+        <a:effectLst/>
+      </p:bgPr>
+    </p:bg>
+    <p:spTree>
+      <p:nvGrpSpPr>
+        <p:cNvPr id="1" name=""/>
+        <p:cNvGrpSpPr/>
+        <p:nvPr/>
+      </p:nvGrpSpPr>
+      <p:grpSpPr/>
+      <p:sp>
+        <p:nvSpPr>
+          <p:cNvPr id="2" name="Rectangle 1"/>
+          <p:cNvSpPr/>
+          <p:nvPr/>
+        </p:nvSpPr>
+        <p:spPr>
+          <a:xfrm>
+            <a:off x="365760" y="137160"/>
+            <a:ext cx="2743200" cy="347472"/>
+          </a:xfrm>
+          <a:prstGeom prst="rect">
+            <a:avLst/>
+          </a:prstGeom>
+          <a:solidFill>
+            <a:srgbClr val="9B5DE5"/>
+          </a:solidFill>
+          <a:ln>
+            <a:noFill/>
+          </a:ln>
+        </p:spPr>
+        <p:style>
+          <a:lnRef idx="1">
+            <a:schemeClr val="accent1"/>
+          </a:lnRef>
+          <a:fillRef idx="3">
+            <a:schemeClr val="accent1"/>
+          </a:fillRef>
+          <a:effectRef idx="2">
+            <a:schemeClr val="accent1"/>
+          </a:effectRef>
+          <a:fontRef idx="minor">
+            <a:schemeClr val="lt1"/>
+          </a:fontRef>
+        </p:style>
+        <p:txBody>
+          <a:bodyPr rtlCol="0" anchor="ctr"/>
+          <a:lstStyle/>
+          <a:p>
+            <a:pPr algn="ctr"/>
+          </a:p>
+        </p:txBody>
+      </p:sp>
+      <p:sp>
+        <p:nvSpPr>
+          <p:cNvPr id="3" name="TextBox 2"/>
+          <p:cNvSpPr txBox="1"/>
+          <p:nvPr/>
+        </p:nvSpPr>
+        <p:spPr>
+          <a:xfrm>
+            <a:off x="365760" y="137160"/>
+            <a:ext cx="2743200" cy="347472"/>
+          </a:xfrm>
+          <a:prstGeom prst="rect">
+            <a:avLst/>
+          </a:prstGeom>
+          <a:noFill/>
+        </p:spPr>
+        <p:txBody>
+          <a:bodyPr wrap="square">
+            <a:spAutoFit/>
+          </a:bodyPr>
+          <a:lstStyle/>
+          <a:p>
+            <a:pPr algn="ctr"/>
+            <a:r>
+              <a:rPr sz="1100" b="1" i="0">
+                <a:solidFill>
+                  <a:srgbClr val="F0EAF8"/>
+                </a:solidFill>
+                <a:latin typeface="Calibri"/>
+              </a:rPr>
+              <a:t>03  Technologies Used</a:t>
+            </a:r>
+          </a:p>
+        </p:txBody>
+      </p:sp>
+      <p:sp>
+        <p:nvSpPr>
+          <p:cNvPr id="4" name="TextBox 3"/>
+          <p:cNvSpPr txBox="1"/>
+          <p:nvPr/>
+        </p:nvSpPr>
+        <p:spPr>
+          <a:xfrm>
+            <a:off x="365760" y="566928"/>
+            <a:ext cx="8412480" cy="658368"/>
+          </a:xfrm>
+          <a:prstGeom prst="rect">
+            <a:avLst/>
+          </a:prstGeom>
+          <a:noFill/>
+        </p:spPr>
+        <p:txBody>
+          <a:bodyPr wrap="square">
+            <a:spAutoFit/>
+          </a:bodyPr>
+          <a:lstStyle/>
+          <a:p>
+            <a:pPr algn="l"/>
+            <a:r>
+              <a:rPr sz="2600" b="1" i="0">
+                <a:solidFill>
+                  <a:srgbClr val="F0EAF8"/>
+                </a:solidFill>
+                <a:latin typeface="Calibri"/>
+              </a:rPr>
+              <a:t>數學公式 ↔ 對應程式碼</a:t>
+            </a:r>
+          </a:p>
+        </p:txBody>
+      </p:sp>
+      <p:sp>
+        <p:nvSpPr>
+          <p:cNvPr id="5" name="TextBox 4"/>
+          <p:cNvSpPr txBox="1"/>
+          <p:nvPr/>
+        </p:nvSpPr>
+        <p:spPr>
+          <a:xfrm>
+            <a:off x="365760" y="1133856"/>
+            <a:ext cx="8412480" cy="274320"/>
+          </a:xfrm>
+          <a:prstGeom prst="rect">
+            <a:avLst/>
+          </a:prstGeom>
+          <a:noFill/>
+        </p:spPr>
+        <p:txBody>
+          <a:bodyPr wrap="square">
+            <a:spAutoFit/>
+          </a:bodyPr>
+          <a:lstStyle/>
+          <a:p>
+            <a:pPr algn="l"/>
+            <a:r>
+              <a:rPr sz="1250" b="0" i="0">
+                <a:solidFill>
+                  <a:srgbClr val="C77DFF"/>
+                </a:solidFill>
+                <a:latin typeface="Calibri"/>
+              </a:rPr>
+              <a:t>彈幕生成演算法 (1/2)　·　角度與速度的幾何配置</a:t>
+            </a:r>
+          </a:p>
+        </p:txBody>
+      </p:sp>
+      <p:sp>
+        <p:nvSpPr>
+          <p:cNvPr id="6" name="Rectangle 5"/>
+          <p:cNvSpPr/>
+          <p:nvPr/>
+        </p:nvSpPr>
+        <p:spPr>
+          <a:xfrm>
+            <a:off x="365760" y="1481328"/>
+            <a:ext cx="8412480" cy="786384"/>
+          </a:xfrm>
+          <a:prstGeom prst="rect">
+            <a:avLst/>
+          </a:prstGeom>
+          <a:solidFill>
+            <a:srgbClr val="1A1230"/>
+          </a:solidFill>
+          <a:ln>
+            <a:noFill/>
+          </a:ln>
+        </p:spPr>
+        <p:style>
+          <a:lnRef idx="1">
+            <a:schemeClr val="accent1"/>
+          </a:lnRef>
+          <a:fillRef idx="3">
+            <a:schemeClr val="accent1"/>
+          </a:fillRef>
+          <a:effectRef idx="2">
+            <a:schemeClr val="accent1"/>
+          </a:effectRef>
+          <a:fontRef idx="minor">
+            <a:schemeClr val="lt1"/>
+          </a:fontRef>
+        </p:style>
+        <p:txBody>
+          <a:bodyPr rtlCol="0" anchor="ctr"/>
+          <a:lstStyle/>
+          <a:p>
+            <a:pPr algn="ctr"/>
+          </a:p>
+        </p:txBody>
+      </p:sp>
+      <p:sp>
+        <p:nvSpPr>
+          <p:cNvPr id="7" name="Oval 6"/>
+          <p:cNvSpPr/>
+          <p:nvPr/>
+        </p:nvSpPr>
+        <p:spPr>
+          <a:xfrm>
+            <a:off x="530352" y="1600200"/>
+            <a:ext cx="146304" cy="146304"/>
+          </a:xfrm>
+          <a:prstGeom prst="ellipse">
+            <a:avLst/>
+          </a:prstGeom>
+          <a:solidFill>
+            <a:srgbClr val="00F5D4"/>
+          </a:solidFill>
+          <a:ln>
+            <a:noFill/>
+          </a:ln>
+        </p:spPr>
+        <p:style>
+          <a:lnRef idx="1">
+            <a:schemeClr val="accent1"/>
+          </a:lnRef>
+          <a:fillRef idx="3">
+            <a:schemeClr val="accent1"/>
+          </a:fillRef>
+          <a:effectRef idx="2">
+            <a:schemeClr val="accent1"/>
+          </a:effectRef>
+          <a:fontRef idx="minor">
+            <a:schemeClr val="lt1"/>
+          </a:fontRef>
+        </p:style>
+        <p:txBody>
+          <a:bodyPr rtlCol="0" anchor="ctr"/>
+          <a:lstStyle/>
+          <a:p>
+            <a:pPr algn="ctr"/>
+          </a:p>
+        </p:txBody>
+      </p:sp>
+      <p:sp>
+        <p:nvSpPr>
+          <p:cNvPr id="8" name="TextBox 7"/>
+          <p:cNvSpPr txBox="1"/>
+          <p:nvPr/>
+        </p:nvSpPr>
+        <p:spPr>
+          <a:xfrm>
+            <a:off x="768096" y="1545336"/>
+            <a:ext cx="2377440" cy="274320"/>
+          </a:xfrm>
+          <a:prstGeom prst="rect">
+            <a:avLst/>
+          </a:prstGeom>
+          <a:noFill/>
+        </p:spPr>
+        <p:txBody>
+          <a:bodyPr wrap="square">
+            <a:spAutoFit/>
+          </a:bodyPr>
+          <a:lstStyle/>
+          <a:p>
+            <a:pPr algn="l"/>
+            <a:r>
+              <a:rPr sz="1300" b="1" i="0">
+                <a:solidFill>
+                  <a:srgbClr val="F0EAF8"/>
+                </a:solidFill>
+                <a:latin typeface="Calibri"/>
+              </a:rPr>
+              <a:t>環形爆散</a:t>
+            </a:r>
+          </a:p>
+        </p:txBody>
+      </p:sp>
+      <p:sp>
+        <p:nvSpPr>
+          <p:cNvPr id="9" name="TextBox 8"/>
+          <p:cNvSpPr txBox="1"/>
+          <p:nvPr/>
+        </p:nvSpPr>
+        <p:spPr>
+          <a:xfrm>
+            <a:off x="548640" y="1819656"/>
+            <a:ext cx="3154680" cy="292608"/>
+          </a:xfrm>
+          <a:prstGeom prst="rect">
+            <a:avLst/>
+          </a:prstGeom>
+          <a:noFill/>
+        </p:spPr>
+        <p:txBody>
+          <a:bodyPr wrap="square">
+            <a:spAutoFit/>
+          </a:bodyPr>
+          <a:lstStyle/>
+          <a:p>
+            <a:pPr algn="l"/>
+            <a:r>
+              <a:rPr sz="1000" b="0" i="0">
+                <a:solidFill>
+                  <a:srgbClr val="FEE440"/>
+                </a:solidFill>
+                <a:latin typeface="Consolas"/>
+              </a:rPr>
+              <a:t>θᵢ = θ₀ + i×(2π/n)</a:t>
+            </a:r>
+          </a:p>
+        </p:txBody>
+      </p:sp>
+      <p:sp>
+        <p:nvSpPr>
+          <p:cNvPr id="10" name="TextBox 9"/>
+          <p:cNvSpPr txBox="1"/>
+          <p:nvPr/>
+        </p:nvSpPr>
+        <p:spPr>
+          <a:xfrm>
+            <a:off x="548640" y="2048256"/>
+            <a:ext cx="3108960" cy="182880"/>
+          </a:xfrm>
+          <a:prstGeom prst="rect">
+            <a:avLst/>
+          </a:prstGeom>
+          <a:noFill/>
+        </p:spPr>
+        <p:txBody>
+          <a:bodyPr wrap="square">
+            <a:spAutoFit/>
+          </a:bodyPr>
+          <a:lstStyle/>
+          <a:p>
+            <a:pPr algn="l"/>
+            <a:r>
+              <a:rPr sz="800" b="0" i="1">
+                <a:solidFill>
+                  <a:srgbClr val="8B80A8"/>
+                </a:solidFill>
+                <a:latin typeface="Consolas"/>
+              </a:rPr>
+              <a:t>BulletPattern.java:16-18</a:t>
+            </a:r>
+          </a:p>
+        </p:txBody>
+      </p:sp>
+      <p:sp>
+        <p:nvSpPr>
+          <p:cNvPr id="11" name="Rectangle 10"/>
+          <p:cNvSpPr/>
+          <p:nvPr/>
+        </p:nvSpPr>
+        <p:spPr>
+          <a:xfrm>
+            <a:off x="3822191" y="1572768"/>
+            <a:ext cx="16459" cy="603503"/>
+          </a:xfrm>
+          <a:prstGeom prst="rect">
+            <a:avLst/>
+          </a:prstGeom>
+          <a:solidFill>
+            <a:srgbClr val="9B5DE5"/>
+          </a:solidFill>
+          <a:ln>
+            <a:noFill/>
+          </a:ln>
+        </p:spPr>
+        <p:style>
+          <a:lnRef idx="1">
+            <a:schemeClr val="accent1"/>
+          </a:lnRef>
+          <a:fillRef idx="3">
+            <a:schemeClr val="accent1"/>
+          </a:fillRef>
+          <a:effectRef idx="2">
+            <a:schemeClr val="accent1"/>
+          </a:effectRef>
+          <a:fontRef idx="minor">
+            <a:schemeClr val="lt1"/>
+          </a:fontRef>
+        </p:style>
+        <p:txBody>
+          <a:bodyPr rtlCol="0" anchor="ctr"/>
+          <a:lstStyle/>
+          <a:p>
+            <a:pPr algn="ctr"/>
+          </a:p>
+        </p:txBody>
+      </p:sp>
+      <p:sp>
+        <p:nvSpPr>
+          <p:cNvPr id="12" name="TextBox 11"/>
+          <p:cNvSpPr txBox="1"/>
+          <p:nvPr/>
+        </p:nvSpPr>
+        <p:spPr>
+          <a:xfrm>
+            <a:off x="3977639" y="1536192"/>
+            <a:ext cx="4663440" cy="676656"/>
+          </a:xfrm>
+          <a:prstGeom prst="rect">
+            <a:avLst/>
+          </a:prstGeom>
+          <a:noFill/>
+        </p:spPr>
+        <p:txBody>
+          <a:bodyPr wrap="square">
+            <a:spAutoFit/>
+          </a:bodyPr>
+          <a:lstStyle/>
+          <a:p>
+            <a:pPr>
+              <a:lnSpc>
+                <a:spcPct val="100000"/>
+              </a:lnSpc>
+            </a:pPr>
+            <a:r>
+              <a:rPr sz="850">
+                <a:solidFill>
+                  <a:srgbClr val="00F5D4"/>
+                </a:solidFill>
+                <a:latin typeface="Consolas"/>
+              </a:rPr>
+              <a:t>for (int i=0; i&lt;count; i++){</a:t>
+            </a:r>
+          </a:p>
+          <a:p>
+            <a:pPr>
+              <a:lnSpc>
+                <a:spcPct val="100000"/>
+              </a:lnSpc>
+            </a:pPr>
+            <a:r>
+              <a:rPr sz="850">
+                <a:solidFill>
+                  <a:srgbClr val="00F5D4"/>
+                </a:solidFill>
+                <a:latin typeface="Consolas"/>
+              </a:rPr>
+              <a:t>  double angle = offsetAngle</a:t>
+            </a:r>
+          </a:p>
+          <a:p>
+            <a:pPr>
+              <a:lnSpc>
+                <a:spcPct val="100000"/>
+              </a:lnSpc>
+            </a:pPr>
+            <a:r>
+              <a:rPr sz="850">
+                <a:solidFill>
+                  <a:srgbClr val="00F5D4"/>
+                </a:solidFill>
+                <a:latin typeface="Consolas"/>
+              </a:rPr>
+              <a:t>      + i*(2*Math.PI/count);</a:t>
+            </a:r>
+          </a:p>
+          <a:p>
+            <a:pPr>
+              <a:lnSpc>
+                <a:spcPct val="100000"/>
+              </a:lnSpc>
+            </a:pPr>
+            <a:r>
+              <a:rPr sz="850">
+                <a:solidFill>
+                  <a:srgbClr val="00F5D4"/>
+                </a:solidFill>
+                <a:latin typeface="Consolas"/>
+              </a:rPr>
+              <a:t>  list.add(new Bullet(x,y,angle,..));</a:t>
+            </a:r>
+          </a:p>
+          <a:p>
+            <a:pPr>
+              <a:lnSpc>
+                <a:spcPct val="100000"/>
+              </a:lnSpc>
+            </a:pPr>
+            <a:r>
+              <a:rPr sz="850">
+                <a:solidFill>
+                  <a:srgbClr val="00F5D4"/>
+                </a:solidFill>
+                <a:latin typeface="Consolas"/>
+              </a:rPr>
+              <a:t>}</a:t>
+            </a:r>
+          </a:p>
+        </p:txBody>
+      </p:sp>
+      <p:sp>
+        <p:nvSpPr>
+          <p:cNvPr id="13" name="Rectangle 12"/>
+          <p:cNvSpPr/>
+          <p:nvPr/>
+        </p:nvSpPr>
+        <p:spPr>
+          <a:xfrm>
+            <a:off x="365760" y="2313432"/>
+            <a:ext cx="8412480" cy="786384"/>
+          </a:xfrm>
+          <a:prstGeom prst="rect">
+            <a:avLst/>
+          </a:prstGeom>
+          <a:solidFill>
+            <a:srgbClr val="1A1230"/>
+          </a:solidFill>
+          <a:ln>
+            <a:noFill/>
+          </a:ln>
+        </p:spPr>
+        <p:style>
+          <a:lnRef idx="1">
+            <a:schemeClr val="accent1"/>
+          </a:lnRef>
+          <a:fillRef idx="3">
+            <a:schemeClr val="accent1"/>
+          </a:fillRef>
+          <a:effectRef idx="2">
+            <a:schemeClr val="accent1"/>
+          </a:effectRef>
+          <a:fontRef idx="minor">
+            <a:schemeClr val="lt1"/>
+          </a:fontRef>
+        </p:style>
+        <p:txBody>
+          <a:bodyPr rtlCol="0" anchor="ctr"/>
+          <a:lstStyle/>
+          <a:p>
+            <a:pPr algn="ctr"/>
+          </a:p>
+        </p:txBody>
+      </p:sp>
+      <p:sp>
+        <p:nvSpPr>
+          <p:cNvPr id="14" name="Oval 13"/>
+          <p:cNvSpPr/>
+          <p:nvPr/>
+        </p:nvSpPr>
+        <p:spPr>
+          <a:xfrm>
+            <a:off x="530352" y="2432304"/>
+            <a:ext cx="146304" cy="146304"/>
+          </a:xfrm>
+          <a:prstGeom prst="ellipse">
+            <a:avLst/>
+          </a:prstGeom>
+          <a:solidFill>
+            <a:srgbClr val="FEE440"/>
+          </a:solidFill>
+          <a:ln>
+            <a:noFill/>
+          </a:ln>
+        </p:spPr>
+        <p:style>
+          <a:lnRef idx="1">
+            <a:schemeClr val="accent1"/>
+          </a:lnRef>
+          <a:fillRef idx="3">
+            <a:schemeClr val="accent1"/>
+          </a:fillRef>
+          <a:effectRef idx="2">
+            <a:schemeClr val="accent1"/>
+          </a:effectRef>
+          <a:fontRef idx="minor">
+            <a:schemeClr val="lt1"/>
+          </a:fontRef>
+        </p:style>
+        <p:txBody>
+          <a:bodyPr rtlCol="0" anchor="ctr"/>
+          <a:lstStyle/>
+          <a:p>
+            <a:pPr algn="ctr"/>
+          </a:p>
+        </p:txBody>
+      </p:sp>
+      <p:sp>
+        <p:nvSpPr>
+          <p:cNvPr id="15" name="TextBox 14"/>
+          <p:cNvSpPr txBox="1"/>
+          <p:nvPr/>
+        </p:nvSpPr>
+        <p:spPr>
+          <a:xfrm>
+            <a:off x="768096" y="2377440"/>
+            <a:ext cx="2377440" cy="274320"/>
+          </a:xfrm>
+          <a:prstGeom prst="rect">
+            <a:avLst/>
+          </a:prstGeom>
+          <a:noFill/>
+        </p:spPr>
+        <p:txBody>
+          <a:bodyPr wrap="square">
+            <a:spAutoFit/>
+          </a:bodyPr>
+          <a:lstStyle/>
+          <a:p>
+            <a:pPr algn="l"/>
+            <a:r>
+              <a:rPr sz="1300" b="1" i="0">
+                <a:solidFill>
+                  <a:srgbClr val="F0EAF8"/>
+                </a:solidFill>
+                <a:latin typeface="Calibri"/>
+              </a:rPr>
+              <a:t>瞄準扇射</a:t>
+            </a:r>
+          </a:p>
+        </p:txBody>
+      </p:sp>
+      <p:sp>
+        <p:nvSpPr>
+          <p:cNvPr id="16" name="TextBox 15"/>
+          <p:cNvSpPr txBox="1"/>
+          <p:nvPr/>
+        </p:nvSpPr>
+        <p:spPr>
+          <a:xfrm>
+            <a:off x="548640" y="2651760"/>
+            <a:ext cx="3154680" cy="292608"/>
+          </a:xfrm>
+          <a:prstGeom prst="rect">
+            <a:avLst/>
+          </a:prstGeom>
+          <a:noFill/>
+        </p:spPr>
+        <p:txBody>
+          <a:bodyPr wrap="square">
+            <a:spAutoFit/>
+          </a:bodyPr>
+          <a:lstStyle/>
+          <a:p>
+            <a:pPr algn="l"/>
+            <a:r>
+              <a:rPr sz="1000" b="0" i="0">
+                <a:solidFill>
+                  <a:srgbClr val="FEE440"/>
+                </a:solidFill>
+                <a:latin typeface="Consolas"/>
+              </a:rPr>
+              <a:t>base = atan2(Δy,Δx) ± spread</a:t>
+            </a:r>
+          </a:p>
+        </p:txBody>
+      </p:sp>
+      <p:sp>
+        <p:nvSpPr>
+          <p:cNvPr id="17" name="TextBox 16"/>
+          <p:cNvSpPr txBox="1"/>
+          <p:nvPr/>
+        </p:nvSpPr>
+        <p:spPr>
+          <a:xfrm>
+            <a:off x="548640" y="2880360"/>
+            <a:ext cx="3108960" cy="182880"/>
+          </a:xfrm>
+          <a:prstGeom prst="rect">
+            <a:avLst/>
+          </a:prstGeom>
+          <a:noFill/>
+        </p:spPr>
+        <p:txBody>
+          <a:bodyPr wrap="square">
+            <a:spAutoFit/>
+          </a:bodyPr>
+          <a:lstStyle/>
+          <a:p>
+            <a:pPr algn="l"/>
+            <a:r>
+              <a:rPr sz="800" b="0" i="1">
+                <a:solidFill>
+                  <a:srgbClr val="8B80A8"/>
+                </a:solidFill>
+                <a:latin typeface="Consolas"/>
+              </a:rPr>
+              <a:t>BulletPattern.java:27-30</a:t>
+            </a:r>
+          </a:p>
+        </p:txBody>
+      </p:sp>
+      <p:sp>
+        <p:nvSpPr>
+          <p:cNvPr id="18" name="Rectangle 17"/>
+          <p:cNvSpPr/>
+          <p:nvPr/>
+        </p:nvSpPr>
+        <p:spPr>
+          <a:xfrm>
+            <a:off x="3822191" y="2404872"/>
+            <a:ext cx="16459" cy="603503"/>
+          </a:xfrm>
+          <a:prstGeom prst="rect">
+            <a:avLst/>
+          </a:prstGeom>
+          <a:solidFill>
+            <a:srgbClr val="9B5DE5"/>
+          </a:solidFill>
+          <a:ln>
+            <a:noFill/>
+          </a:ln>
+        </p:spPr>
+        <p:style>
+          <a:lnRef idx="1">
+            <a:schemeClr val="accent1"/>
+          </a:lnRef>
+          <a:fillRef idx="3">
+            <a:schemeClr val="accent1"/>
+          </a:fillRef>
+          <a:effectRef idx="2">
+            <a:schemeClr val="accent1"/>
+          </a:effectRef>
+          <a:fontRef idx="minor">
+            <a:schemeClr val="lt1"/>
+          </a:fontRef>
+        </p:style>
+        <p:txBody>
+          <a:bodyPr rtlCol="0" anchor="ctr"/>
+          <a:lstStyle/>
+          <a:p>
+            <a:pPr algn="ctr"/>
+          </a:p>
+        </p:txBody>
+      </p:sp>
+      <p:sp>
+        <p:nvSpPr>
+          <p:cNvPr id="19" name="TextBox 18"/>
+          <p:cNvSpPr txBox="1"/>
+          <p:nvPr/>
+        </p:nvSpPr>
+        <p:spPr>
+          <a:xfrm>
+            <a:off x="3977639" y="2368296"/>
+            <a:ext cx="4663440" cy="676656"/>
+          </a:xfrm>
+          <a:prstGeom prst="rect">
+            <a:avLst/>
+          </a:prstGeom>
+          <a:noFill/>
+        </p:spPr>
+        <p:txBody>
+          <a:bodyPr wrap="square">
+            <a:spAutoFit/>
+          </a:bodyPr>
+          <a:lstStyle/>
+          <a:p>
+            <a:pPr>
+              <a:lnSpc>
+                <a:spcPct val="100000"/>
+              </a:lnSpc>
+            </a:pPr>
+            <a:r>
+              <a:rPr sz="850">
+                <a:solidFill>
+                  <a:srgbClr val="00F5D4"/>
+                </a:solidFill>
+                <a:latin typeface="Consolas"/>
+              </a:rPr>
+              <a:t>double base = Math.atan2(py-y, px-x);</a:t>
+            </a:r>
+          </a:p>
+          <a:p>
+            <a:pPr>
+              <a:lnSpc>
+                <a:spcPct val="100000"/>
+              </a:lnSpc>
+            </a:pPr>
+            <a:r>
+              <a:rPr sz="850">
+                <a:solidFill>
+                  <a:srgbClr val="00F5D4"/>
+                </a:solidFill>
+                <a:latin typeface="Consolas"/>
+              </a:rPr>
+              <a:t>double off = -spread/2</a:t>
+            </a:r>
+          </a:p>
+          <a:p>
+            <a:pPr>
+              <a:lnSpc>
+                <a:spcPct val="100000"/>
+              </a:lnSpc>
+            </a:pPr>
+            <a:r>
+              <a:rPr sz="850">
+                <a:solidFill>
+                  <a:srgbClr val="00F5D4"/>
+                </a:solidFill>
+                <a:latin typeface="Consolas"/>
+              </a:rPr>
+              <a:t>    + spread*i/(count-1);</a:t>
+            </a:r>
+          </a:p>
+          <a:p>
+            <a:pPr>
+              <a:lnSpc>
+                <a:spcPct val="100000"/>
+              </a:lnSpc>
+            </a:pPr>
+            <a:r>
+              <a:rPr sz="850">
+                <a:solidFill>
+                  <a:srgbClr val="00F5D4"/>
+                </a:solidFill>
+                <a:latin typeface="Consolas"/>
+              </a:rPr>
+              <a:t>new Bullet(x,y, base+off, speed,..);</a:t>
+            </a:r>
+          </a:p>
+        </p:txBody>
+      </p:sp>
+      <p:sp>
+        <p:nvSpPr>
+          <p:cNvPr id="20" name="Rectangle 19"/>
+          <p:cNvSpPr/>
+          <p:nvPr/>
+        </p:nvSpPr>
+        <p:spPr>
+          <a:xfrm>
+            <a:off x="365760" y="3145536"/>
+            <a:ext cx="8412480" cy="786384"/>
+          </a:xfrm>
+          <a:prstGeom prst="rect">
+            <a:avLst/>
+          </a:prstGeom>
+          <a:solidFill>
+            <a:srgbClr val="1A1230"/>
+          </a:solidFill>
+          <a:ln>
+            <a:noFill/>
+          </a:ln>
+        </p:spPr>
+        <p:style>
+          <a:lnRef idx="1">
+            <a:schemeClr val="accent1"/>
+          </a:lnRef>
+          <a:fillRef idx="3">
+            <a:schemeClr val="accent1"/>
+          </a:fillRef>
+          <a:effectRef idx="2">
+            <a:schemeClr val="accent1"/>
+          </a:effectRef>
+          <a:fontRef idx="minor">
+            <a:schemeClr val="lt1"/>
+          </a:fontRef>
+        </p:style>
+        <p:txBody>
+          <a:bodyPr rtlCol="0" anchor="ctr"/>
+          <a:lstStyle/>
+          <a:p>
+            <a:pPr algn="ctr"/>
+          </a:p>
+        </p:txBody>
+      </p:sp>
+      <p:sp>
+        <p:nvSpPr>
+          <p:cNvPr id="21" name="Oval 20"/>
+          <p:cNvSpPr/>
+          <p:nvPr/>
+        </p:nvSpPr>
+        <p:spPr>
+          <a:xfrm>
+            <a:off x="530352" y="3264408"/>
+            <a:ext cx="146304" cy="146304"/>
+          </a:xfrm>
+          <a:prstGeom prst="ellipse">
+            <a:avLst/>
+          </a:prstGeom>
+          <a:solidFill>
+            <a:srgbClr val="C77DFF"/>
+          </a:solidFill>
+          <a:ln>
+            <a:noFill/>
+          </a:ln>
+        </p:spPr>
+        <p:style>
+          <a:lnRef idx="1">
+            <a:schemeClr val="accent1"/>
+          </a:lnRef>
+          <a:fillRef idx="3">
+            <a:schemeClr val="accent1"/>
+          </a:fillRef>
+          <a:effectRef idx="2">
+            <a:schemeClr val="accent1"/>
+          </a:effectRef>
+          <a:fontRef idx="minor">
+            <a:schemeClr val="lt1"/>
+          </a:fontRef>
+        </p:style>
+        <p:txBody>
+          <a:bodyPr rtlCol="0" anchor="ctr"/>
+          <a:lstStyle/>
+          <a:p>
+            <a:pPr algn="ctr"/>
+          </a:p>
+        </p:txBody>
+      </p:sp>
+      <p:sp>
+        <p:nvSpPr>
+          <p:cNvPr id="22" name="TextBox 21"/>
+          <p:cNvSpPr txBox="1"/>
+          <p:nvPr/>
+        </p:nvSpPr>
+        <p:spPr>
+          <a:xfrm>
+            <a:off x="768096" y="3209544"/>
+            <a:ext cx="2377440" cy="274320"/>
+          </a:xfrm>
+          <a:prstGeom prst="rect">
+            <a:avLst/>
+          </a:prstGeom>
+          <a:noFill/>
+        </p:spPr>
+        <p:txBody>
+          <a:bodyPr wrap="square">
+            <a:spAutoFit/>
+          </a:bodyPr>
+          <a:lstStyle/>
+          <a:p>
+            <a:pPr algn="l"/>
+            <a:r>
+              <a:rPr sz="1300" b="1" i="0">
+                <a:solidFill>
+                  <a:srgbClr val="F0EAF8"/>
+                </a:solidFill>
+                <a:latin typeface="Calibri"/>
+              </a:rPr>
+              <a:t>雙環交轉</a:t>
+            </a:r>
+          </a:p>
+        </p:txBody>
+      </p:sp>
+      <p:sp>
+        <p:nvSpPr>
+          <p:cNvPr id="23" name="TextBox 22"/>
+          <p:cNvSpPr txBox="1"/>
+          <p:nvPr/>
+        </p:nvSpPr>
+        <p:spPr>
+          <a:xfrm>
+            <a:off x="548640" y="3483864"/>
+            <a:ext cx="3154680" cy="292608"/>
+          </a:xfrm>
+          <a:prstGeom prst="rect">
+            <a:avLst/>
+          </a:prstGeom>
+          <a:noFill/>
+        </p:spPr>
+        <p:txBody>
+          <a:bodyPr wrap="square">
+            <a:spAutoFit/>
+          </a:bodyPr>
+          <a:lstStyle/>
+          <a:p>
+            <a:pPr algn="l"/>
+            <a:r>
+              <a:rPr sz="1000" b="0" i="0">
+                <a:solidFill>
+                  <a:srgbClr val="FEE440"/>
+                </a:solidFill>
+                <a:latin typeface="Consolas"/>
+              </a:rPr>
+              <a:t>outer_v&gt;0, inner_v&lt;0</a:t>
+            </a:r>
+          </a:p>
+        </p:txBody>
+      </p:sp>
+      <p:sp>
+        <p:nvSpPr>
+          <p:cNvPr id="24" name="TextBox 23"/>
+          <p:cNvSpPr txBox="1"/>
+          <p:nvPr/>
+        </p:nvSpPr>
+        <p:spPr>
+          <a:xfrm>
+            <a:off x="548640" y="3712464"/>
+            <a:ext cx="3108960" cy="182880"/>
+          </a:xfrm>
+          <a:prstGeom prst="rect">
+            <a:avLst/>
+          </a:prstGeom>
+          <a:noFill/>
+        </p:spPr>
+        <p:txBody>
+          <a:bodyPr wrap="square">
+            <a:spAutoFit/>
+          </a:bodyPr>
+          <a:lstStyle/>
+          <a:p>
+            <a:pPr algn="l"/>
+            <a:r>
+              <a:rPr sz="800" b="0" i="1">
+                <a:solidFill>
+                  <a:srgbClr val="8B80A8"/>
+                </a:solidFill>
+                <a:latin typeface="Consolas"/>
+              </a:rPr>
+              <a:t>BulletPattern.java:51-52</a:t>
+            </a:r>
+          </a:p>
+        </p:txBody>
+      </p:sp>
+      <p:sp>
+        <p:nvSpPr>
+          <p:cNvPr id="25" name="Rectangle 24"/>
+          <p:cNvSpPr/>
+          <p:nvPr/>
+        </p:nvSpPr>
+        <p:spPr>
+          <a:xfrm>
+            <a:off x="3822191" y="3236976"/>
+            <a:ext cx="16459" cy="603503"/>
+          </a:xfrm>
+          <a:prstGeom prst="rect">
+            <a:avLst/>
+          </a:prstGeom>
+          <a:solidFill>
+            <a:srgbClr val="9B5DE5"/>
+          </a:solidFill>
+          <a:ln>
+            <a:noFill/>
+          </a:ln>
+        </p:spPr>
+        <p:style>
+          <a:lnRef idx="1">
+            <a:schemeClr val="accent1"/>
+          </a:lnRef>
+          <a:fillRef idx="3">
+            <a:schemeClr val="accent1"/>
+          </a:fillRef>
+          <a:effectRef idx="2">
+            <a:schemeClr val="accent1"/>
+          </a:effectRef>
+          <a:fontRef idx="minor">
+            <a:schemeClr val="lt1"/>
+          </a:fontRef>
+        </p:style>
+        <p:txBody>
+          <a:bodyPr rtlCol="0" anchor="ctr"/>
+          <a:lstStyle/>
+          <a:p>
+            <a:pPr algn="ctr"/>
+          </a:p>
+        </p:txBody>
+      </p:sp>
+      <p:sp>
+        <p:nvSpPr>
+          <p:cNvPr id="26" name="TextBox 25"/>
+          <p:cNvSpPr txBox="1"/>
+          <p:nvPr/>
+        </p:nvSpPr>
+        <p:spPr>
+          <a:xfrm>
+            <a:off x="3977639" y="3200400"/>
+            <a:ext cx="4663440" cy="676656"/>
+          </a:xfrm>
+          <a:prstGeom prst="rect">
+            <a:avLst/>
+          </a:prstGeom>
+          <a:noFill/>
+        </p:spPr>
+        <p:txBody>
+          <a:bodyPr wrap="square">
+            <a:spAutoFit/>
+          </a:bodyPr>
+          <a:lstStyle/>
+          <a:p>
+            <a:pPr>
+              <a:lnSpc>
+                <a:spcPct val="100000"/>
+              </a:lnSpc>
+            </a:pPr>
+            <a:r>
+              <a:rPr sz="850">
+                <a:solidFill>
+                  <a:srgbClr val="00F5D4"/>
+                </a:solidFill>
+                <a:latin typeface="Consolas"/>
+              </a:rPr>
+              <a:t>circularBurst(.., outerSpeed,.., offset);</a:t>
+            </a:r>
+          </a:p>
+          <a:p>
+            <a:pPr>
+              <a:lnSpc>
+                <a:spcPct val="100000"/>
+              </a:lnSpc>
+            </a:pPr>
+            <a:r>
+              <a:rPr sz="850">
+                <a:solidFill>
+                  <a:srgbClr val="00F5D4"/>
+                </a:solidFill>
+                <a:latin typeface="Consolas"/>
+              </a:rPr>
+              <a:t>circularBurst(.., innerSpeed,..,</a:t>
+            </a:r>
+          </a:p>
+          <a:p>
+            <a:pPr>
+              <a:lnSpc>
+                <a:spcPct val="100000"/>
+              </a:lnSpc>
+            </a:pPr>
+            <a:r>
+              <a:rPr sz="850">
+                <a:solidFill>
+                  <a:srgbClr val="00F5D4"/>
+                </a:solidFill>
+                <a:latin typeface="Consolas"/>
+              </a:rPr>
+              <a:t>    offset + Math.PI/count);  // 內環反向</a:t>
+            </a:r>
+          </a:p>
+        </p:txBody>
+      </p:sp>
+      <p:sp>
+        <p:nvSpPr>
+          <p:cNvPr id="27" name="Rectangle 26"/>
+          <p:cNvSpPr/>
+          <p:nvPr/>
+        </p:nvSpPr>
+        <p:spPr>
+          <a:xfrm>
+            <a:off x="365760" y="3977639"/>
+            <a:ext cx="8412480" cy="786384"/>
+          </a:xfrm>
+          <a:prstGeom prst="rect">
+            <a:avLst/>
+          </a:prstGeom>
+          <a:solidFill>
+            <a:srgbClr val="1A1230"/>
+          </a:solidFill>
+          <a:ln>
+            <a:noFill/>
+          </a:ln>
+        </p:spPr>
+        <p:style>
+          <a:lnRef idx="1">
+            <a:schemeClr val="accent1"/>
+          </a:lnRef>
+          <a:fillRef idx="3">
+            <a:schemeClr val="accent1"/>
+          </a:fillRef>
+          <a:effectRef idx="2">
+            <a:schemeClr val="accent1"/>
+          </a:effectRef>
+          <a:fontRef idx="minor">
+            <a:schemeClr val="lt1"/>
+          </a:fontRef>
+        </p:style>
+        <p:txBody>
+          <a:bodyPr rtlCol="0" anchor="ctr"/>
+          <a:lstStyle/>
+          <a:p>
+            <a:pPr algn="ctr"/>
+          </a:p>
+        </p:txBody>
+      </p:sp>
+      <p:sp>
+        <p:nvSpPr>
+          <p:cNvPr id="28" name="Oval 27"/>
+          <p:cNvSpPr/>
+          <p:nvPr/>
+        </p:nvSpPr>
+        <p:spPr>
+          <a:xfrm>
+            <a:off x="530352" y="4096511"/>
+            <a:ext cx="146304" cy="146304"/>
+          </a:xfrm>
+          <a:prstGeom prst="ellipse">
+            <a:avLst/>
+          </a:prstGeom>
+          <a:solidFill>
+            <a:srgbClr val="57CC99"/>
+          </a:solidFill>
+          <a:ln>
+            <a:noFill/>
+          </a:ln>
+        </p:spPr>
+        <p:style>
+          <a:lnRef idx="1">
+            <a:schemeClr val="accent1"/>
+          </a:lnRef>
+          <a:fillRef idx="3">
+            <a:schemeClr val="accent1"/>
+          </a:fillRef>
+          <a:effectRef idx="2">
+            <a:schemeClr val="accent1"/>
+          </a:effectRef>
+          <a:fontRef idx="minor">
+            <a:schemeClr val="lt1"/>
+          </a:fontRef>
+        </p:style>
+        <p:txBody>
+          <a:bodyPr rtlCol="0" anchor="ctr"/>
+          <a:lstStyle/>
+          <a:p>
+            <a:pPr algn="ctr"/>
+          </a:p>
+        </p:txBody>
+      </p:sp>
+      <p:sp>
+        <p:nvSpPr>
+          <p:cNvPr id="29" name="TextBox 28"/>
+          <p:cNvSpPr txBox="1"/>
+          <p:nvPr/>
+        </p:nvSpPr>
+        <p:spPr>
+          <a:xfrm>
+            <a:off x="768096" y="4041648"/>
+            <a:ext cx="2377440" cy="274320"/>
+          </a:xfrm>
+          <a:prstGeom prst="rect">
+            <a:avLst/>
+          </a:prstGeom>
+          <a:noFill/>
+        </p:spPr>
+        <p:txBody>
+          <a:bodyPr wrap="square">
+            <a:spAutoFit/>
+          </a:bodyPr>
+          <a:lstStyle/>
+          <a:p>
+            <a:pPr algn="l"/>
+            <a:r>
+              <a:rPr sz="1300" b="1" i="0">
+                <a:solidFill>
+                  <a:srgbClr val="F0EAF8"/>
+                </a:solidFill>
+                <a:latin typeface="Calibri"/>
+              </a:rPr>
+              <a:t>星爆交錯</a:t>
+            </a:r>
+          </a:p>
+        </p:txBody>
+      </p:sp>
+      <p:sp>
+        <p:nvSpPr>
+          <p:cNvPr id="30" name="TextBox 29"/>
+          <p:cNvSpPr txBox="1"/>
+          <p:nvPr/>
+        </p:nvSpPr>
+        <p:spPr>
+          <a:xfrm>
+            <a:off x="548640" y="4315968"/>
+            <a:ext cx="3154680" cy="292608"/>
+          </a:xfrm>
+          <a:prstGeom prst="rect">
+            <a:avLst/>
+          </a:prstGeom>
+          <a:noFill/>
+        </p:spPr>
+        <p:txBody>
+          <a:bodyPr wrap="square">
+            <a:spAutoFit/>
+          </a:bodyPr>
+          <a:lstStyle/>
+          <a:p>
+            <a:pPr algn="l"/>
+            <a:r>
+              <a:rPr sz="1000" b="0" i="0">
+                <a:solidFill>
+                  <a:srgbClr val="FEE440"/>
+                </a:solidFill>
+                <a:latin typeface="Consolas"/>
+              </a:rPr>
+              <a:t>speed = (i%2==0)? fast : slow</a:t>
+            </a:r>
+          </a:p>
+        </p:txBody>
+      </p:sp>
+      <p:sp>
+        <p:nvSpPr>
+          <p:cNvPr id="31" name="TextBox 30"/>
+          <p:cNvSpPr txBox="1"/>
+          <p:nvPr/>
+        </p:nvSpPr>
+        <p:spPr>
+          <a:xfrm>
+            <a:off x="548640" y="4544568"/>
+            <a:ext cx="3108960" cy="182880"/>
+          </a:xfrm>
+          <a:prstGeom prst="rect">
+            <a:avLst/>
+          </a:prstGeom>
+          <a:noFill/>
+        </p:spPr>
+        <p:txBody>
+          <a:bodyPr wrap="square">
+            <a:spAutoFit/>
+          </a:bodyPr>
+          <a:lstStyle/>
+          <a:p>
+            <a:pPr algn="l"/>
+            <a:r>
+              <a:rPr sz="800" b="0" i="1">
+                <a:solidFill>
+                  <a:srgbClr val="8B80A8"/>
+                </a:solidFill>
+                <a:latin typeface="Consolas"/>
+              </a:rPr>
+              <a:t>BulletPattern.java:60-63</a:t>
+            </a:r>
+          </a:p>
+        </p:txBody>
+      </p:sp>
+      <p:sp>
+        <p:nvSpPr>
+          <p:cNvPr id="32" name="Rectangle 31"/>
+          <p:cNvSpPr/>
+          <p:nvPr/>
+        </p:nvSpPr>
+        <p:spPr>
+          <a:xfrm>
+            <a:off x="3822191" y="4069079"/>
+            <a:ext cx="16459" cy="603503"/>
+          </a:xfrm>
+          <a:prstGeom prst="rect">
+            <a:avLst/>
+          </a:prstGeom>
+          <a:solidFill>
+            <a:srgbClr val="9B5DE5"/>
+          </a:solidFill>
+          <a:ln>
+            <a:noFill/>
+          </a:ln>
+        </p:spPr>
+        <p:style>
+          <a:lnRef idx="1">
+            <a:schemeClr val="accent1"/>
+          </a:lnRef>
+          <a:fillRef idx="3">
+            <a:schemeClr val="accent1"/>
+          </a:fillRef>
+          <a:effectRef idx="2">
+            <a:schemeClr val="accent1"/>
+          </a:effectRef>
+          <a:fontRef idx="minor">
+            <a:schemeClr val="lt1"/>
+          </a:fontRef>
+        </p:style>
+        <p:txBody>
+          <a:bodyPr rtlCol="0" anchor="ctr"/>
+          <a:lstStyle/>
+          <a:p>
+            <a:pPr algn="ctr"/>
+          </a:p>
+        </p:txBody>
+      </p:sp>
+      <p:sp>
+        <p:nvSpPr>
+          <p:cNvPr id="33" name="TextBox 32"/>
+          <p:cNvSpPr txBox="1"/>
+          <p:nvPr/>
+        </p:nvSpPr>
+        <p:spPr>
+          <a:xfrm>
+            <a:off x="3977639" y="4032503"/>
+            <a:ext cx="4663440" cy="676656"/>
+          </a:xfrm>
+          <a:prstGeom prst="rect">
+            <a:avLst/>
+          </a:prstGeom>
+          <a:noFill/>
+        </p:spPr>
+        <p:txBody>
+          <a:bodyPr wrap="square">
+            <a:spAutoFit/>
+          </a:bodyPr>
+          <a:lstStyle/>
+          <a:p>
+            <a:pPr>
+              <a:lnSpc>
+                <a:spcPct val="100000"/>
+              </a:lnSpc>
+            </a:pPr>
+            <a:r>
+              <a:rPr sz="850">
+                <a:solidFill>
+                  <a:srgbClr val="00F5D4"/>
+                </a:solidFill>
+                <a:latin typeface="Consolas"/>
+              </a:rPr>
+              <a:t>double angle = offset + i*(2*Math.PI/count);</a:t>
+            </a:r>
+          </a:p>
+          <a:p>
+            <a:pPr>
+              <a:lnSpc>
+                <a:spcPct val="100000"/>
+              </a:lnSpc>
+            </a:pPr>
+            <a:r>
+              <a:rPr sz="850">
+                <a:solidFill>
+                  <a:srgbClr val="00F5D4"/>
+                </a:solidFill>
+                <a:latin typeface="Consolas"/>
+              </a:rPr>
+              <a:t>double speed = (i%2==0)</a:t>
+            </a:r>
+          </a:p>
+          <a:p>
+            <a:pPr>
+              <a:lnSpc>
+                <a:spcPct val="100000"/>
+              </a:lnSpc>
+            </a:pPr>
+            <a:r>
+              <a:rPr sz="850">
+                <a:solidFill>
+                  <a:srgbClr val="00F5D4"/>
+                </a:solidFill>
+                <a:latin typeface="Consolas"/>
+              </a:rPr>
+              <a:t>    ? fastSpeed : slowSpeed;</a:t>
+            </a:r>
+          </a:p>
+          <a:p>
+            <a:pPr>
+              <a:lnSpc>
+                <a:spcPct val="100000"/>
+              </a:lnSpc>
+            </a:pPr>
+            <a:r>
+              <a:rPr sz="850">
+                <a:solidFill>
+                  <a:srgbClr val="00F5D4"/>
+                </a:solidFill>
+                <a:latin typeface="Consolas"/>
+              </a:rPr>
+              <a:t>new Bullet(x,y,angle,speed,..);</a:t>
+            </a:r>
+          </a:p>
+        </p:txBody>
+      </p:sp>
+      <p:sp>
+        <p:nvSpPr>
+          <p:cNvPr id="34" name="TextBox 33"/>
+          <p:cNvSpPr txBox="1"/>
+          <p:nvPr/>
+        </p:nvSpPr>
+        <p:spPr>
+          <a:xfrm>
+            <a:off x="365760" y="4828031"/>
+            <a:ext cx="8412480" cy="237744"/>
+          </a:xfrm>
+          <a:prstGeom prst="rect">
+            <a:avLst/>
+          </a:prstGeom>
+          <a:noFill/>
+        </p:spPr>
+        <p:txBody>
+          <a:bodyPr wrap="square">
+            <a:spAutoFit/>
+          </a:bodyPr>
+          <a:lstStyle/>
+          <a:p>
+            <a:pPr algn="l"/>
+            <a:r>
+              <a:rPr sz="900" b="0" i="1">
+                <a:solidFill>
+                  <a:srgbClr val="8B80A8"/>
+                </a:solidFill>
+                <a:latin typeface="Calibri"/>
+              </a:rPr>
+              <a:t>＊公式中的角度均以弧度表示；count = n 為發射數，offsetAngle 為起始相位。</a:t>
+            </a:r>
+          </a:p>
+        </p:txBody>
+      </p:sp>
+    </p:spTree>
+  </p:cSld>
+  <p:clrMapOvr>
+    <a:masterClrMapping/>
+  </p:clrMapOvr>
+</p:sld>
+</file>
+
+<file path=ppt/slides/slide12.xml><?xml version="1.0" encoding="utf-8"?>
+<p:sld xmlns:a="http://schemas.openxmlformats.org/drawingml/2006/main" xmlns:p="http://schemas.openxmlformats.org/presentationml/2006/main" xmlns:r="http://schemas.openxmlformats.org/officeDocument/2006/relationships">
+  <p:cSld>
+    <p:bg>
+      <p:bgPr>
+        <a:solidFill>
+          <a:srgbClr val="0F0A1E"/>
+        </a:solidFill>
+        <a:effectLst/>
+      </p:bgPr>
+    </p:bg>
+    <p:spTree>
+      <p:nvGrpSpPr>
+        <p:cNvPr id="1" name=""/>
+        <p:cNvGrpSpPr/>
+        <p:nvPr/>
+      </p:nvGrpSpPr>
+      <p:grpSpPr/>
+      <p:sp>
+        <p:nvSpPr>
+          <p:cNvPr id="2" name="Rectangle 1"/>
+          <p:cNvSpPr/>
+          <p:nvPr/>
+        </p:nvSpPr>
+        <p:spPr>
+          <a:xfrm>
+            <a:off x="365760" y="137160"/>
+            <a:ext cx="2743200" cy="347472"/>
+          </a:xfrm>
+          <a:prstGeom prst="rect">
+            <a:avLst/>
+          </a:prstGeom>
+          <a:solidFill>
+            <a:srgbClr val="9B5DE5"/>
+          </a:solidFill>
+          <a:ln>
+            <a:noFill/>
+          </a:ln>
+        </p:spPr>
+        <p:style>
+          <a:lnRef idx="1">
+            <a:schemeClr val="accent1"/>
+          </a:lnRef>
+          <a:fillRef idx="3">
+            <a:schemeClr val="accent1"/>
+          </a:fillRef>
+          <a:effectRef idx="2">
+            <a:schemeClr val="accent1"/>
+          </a:effectRef>
+          <a:fontRef idx="minor">
+            <a:schemeClr val="lt1"/>
+          </a:fontRef>
+        </p:style>
+        <p:txBody>
+          <a:bodyPr rtlCol="0" anchor="ctr"/>
+          <a:lstStyle/>
+          <a:p>
+            <a:pPr algn="ctr"/>
+          </a:p>
+        </p:txBody>
+      </p:sp>
+      <p:sp>
+        <p:nvSpPr>
+          <p:cNvPr id="3" name="TextBox 2"/>
+          <p:cNvSpPr txBox="1"/>
+          <p:nvPr/>
+        </p:nvSpPr>
+        <p:spPr>
+          <a:xfrm>
+            <a:off x="365760" y="137160"/>
+            <a:ext cx="2743200" cy="347472"/>
+          </a:xfrm>
+          <a:prstGeom prst="rect">
+            <a:avLst/>
+          </a:prstGeom>
+          <a:noFill/>
+        </p:spPr>
+        <p:txBody>
+          <a:bodyPr wrap="square">
+            <a:spAutoFit/>
+          </a:bodyPr>
+          <a:lstStyle/>
+          <a:p>
+            <a:pPr algn="ctr"/>
+            <a:r>
+              <a:rPr sz="1100" b="1" i="0">
+                <a:solidFill>
+                  <a:srgbClr val="F0EAF8"/>
+                </a:solidFill>
+                <a:latin typeface="Calibri"/>
+              </a:rPr>
+              <a:t>03  Technologies Used</a:t>
+            </a:r>
+          </a:p>
+        </p:txBody>
+      </p:sp>
+      <p:sp>
+        <p:nvSpPr>
+          <p:cNvPr id="4" name="TextBox 3"/>
+          <p:cNvSpPr txBox="1"/>
+          <p:nvPr/>
+        </p:nvSpPr>
+        <p:spPr>
+          <a:xfrm>
+            <a:off x="365760" y="566928"/>
+            <a:ext cx="8412480" cy="658368"/>
+          </a:xfrm>
+          <a:prstGeom prst="rect">
+            <a:avLst/>
+          </a:prstGeom>
+          <a:noFill/>
+        </p:spPr>
+        <p:txBody>
+          <a:bodyPr wrap="square">
+            <a:spAutoFit/>
+          </a:bodyPr>
+          <a:lstStyle/>
+          <a:p>
+            <a:pPr algn="l"/>
+            <a:r>
+              <a:rPr sz="2600" b="1" i="0">
+                <a:solidFill>
+                  <a:srgbClr val="F0EAF8"/>
+                </a:solidFill>
+                <a:latin typeface="Calibri"/>
+              </a:rPr>
+              <a:t>數學公式 ↔ 對應程式碼</a:t>
+            </a:r>
+          </a:p>
+        </p:txBody>
+      </p:sp>
+      <p:sp>
+        <p:nvSpPr>
+          <p:cNvPr id="5" name="TextBox 4"/>
+          <p:cNvSpPr txBox="1"/>
+          <p:nvPr/>
+        </p:nvSpPr>
+        <p:spPr>
+          <a:xfrm>
+            <a:off x="365760" y="1133856"/>
+            <a:ext cx="8412480" cy="274320"/>
+          </a:xfrm>
+          <a:prstGeom prst="rect">
+            <a:avLst/>
+          </a:prstGeom>
+          <a:noFill/>
+        </p:spPr>
+        <p:txBody>
+          <a:bodyPr wrap="square">
+            <a:spAutoFit/>
+          </a:bodyPr>
+          <a:lstStyle/>
+          <a:p>
+            <a:pPr algn="l"/>
+            <a:r>
+              <a:rPr sz="1250" b="0" i="0">
+                <a:solidFill>
+                  <a:srgbClr val="C77DFF"/>
+                </a:solidFill>
+                <a:latin typeface="Calibri"/>
+              </a:rPr>
+              <a:t>彈幕生成演算法 (2/2)　·　逐幀更新與三角參數</a:t>
+            </a:r>
+          </a:p>
+        </p:txBody>
+      </p:sp>
+      <p:sp>
+        <p:nvSpPr>
+          <p:cNvPr id="6" name="Rectangle 5"/>
+          <p:cNvSpPr/>
+          <p:nvPr/>
+        </p:nvSpPr>
+        <p:spPr>
+          <a:xfrm>
+            <a:off x="365760" y="1481328"/>
+            <a:ext cx="8412480" cy="786384"/>
+          </a:xfrm>
+          <a:prstGeom prst="rect">
+            <a:avLst/>
+          </a:prstGeom>
+          <a:solidFill>
+            <a:srgbClr val="1A1230"/>
+          </a:solidFill>
+          <a:ln>
+            <a:noFill/>
+          </a:ln>
+        </p:spPr>
+        <p:style>
+          <a:lnRef idx="1">
+            <a:schemeClr val="accent1"/>
+          </a:lnRef>
+          <a:fillRef idx="3">
+            <a:schemeClr val="accent1"/>
+          </a:fillRef>
+          <a:effectRef idx="2">
+            <a:schemeClr val="accent1"/>
+          </a:effectRef>
+          <a:fontRef idx="minor">
+            <a:schemeClr val="lt1"/>
+          </a:fontRef>
+        </p:style>
+        <p:txBody>
+          <a:bodyPr rtlCol="0" anchor="ctr"/>
+          <a:lstStyle/>
+          <a:p>
+            <a:pPr algn="ctr"/>
+          </a:p>
+        </p:txBody>
+      </p:sp>
+      <p:sp>
+        <p:nvSpPr>
+          <p:cNvPr id="7" name="Oval 6"/>
+          <p:cNvSpPr/>
+          <p:nvPr/>
+        </p:nvSpPr>
+        <p:spPr>
+          <a:xfrm>
+            <a:off x="530352" y="1600200"/>
+            <a:ext cx="146304" cy="146304"/>
+          </a:xfrm>
+          <a:prstGeom prst="ellipse">
+            <a:avLst/>
+          </a:prstGeom>
+          <a:solidFill>
+            <a:srgbClr val="FEE440"/>
+          </a:solidFill>
+          <a:ln>
+            <a:noFill/>
+          </a:ln>
+        </p:spPr>
+        <p:style>
+          <a:lnRef idx="1">
+            <a:schemeClr val="accent1"/>
+          </a:lnRef>
+          <a:fillRef idx="3">
+            <a:schemeClr val="accent1"/>
+          </a:fillRef>
+          <a:effectRef idx="2">
+            <a:schemeClr val="accent1"/>
+          </a:effectRef>
+          <a:fontRef idx="minor">
+            <a:schemeClr val="lt1"/>
+          </a:fontRef>
+        </p:style>
+        <p:txBody>
+          <a:bodyPr rtlCol="0" anchor="ctr"/>
+          <a:lstStyle/>
+          <a:p>
+            <a:pPr algn="ctr"/>
+          </a:p>
+        </p:txBody>
+      </p:sp>
+      <p:sp>
+        <p:nvSpPr>
+          <p:cNvPr id="8" name="TextBox 7"/>
+          <p:cNvSpPr txBox="1"/>
+          <p:nvPr/>
+        </p:nvSpPr>
+        <p:spPr>
+          <a:xfrm>
+            <a:off x="768096" y="1545336"/>
+            <a:ext cx="2377440" cy="274320"/>
+          </a:xfrm>
+          <a:prstGeom prst="rect">
+            <a:avLst/>
+          </a:prstGeom>
+          <a:noFill/>
+        </p:spPr>
+        <p:txBody>
+          <a:bodyPr wrap="square">
+            <a:spAutoFit/>
+          </a:bodyPr>
+          <a:lstStyle/>
+          <a:p>
+            <a:pPr algn="l"/>
+            <a:r>
+              <a:rPr sz="1300" b="1" i="0">
+                <a:solidFill>
+                  <a:srgbClr val="F0EAF8"/>
+                </a:solidFill>
+                <a:latin typeface="Calibri"/>
+              </a:rPr>
+              <a:t>螺旋臂</a:t>
+            </a:r>
+          </a:p>
+        </p:txBody>
+      </p:sp>
+      <p:sp>
+        <p:nvSpPr>
+          <p:cNvPr id="9" name="TextBox 8"/>
+          <p:cNvSpPr txBox="1"/>
+          <p:nvPr/>
+        </p:nvSpPr>
+        <p:spPr>
+          <a:xfrm>
+            <a:off x="548640" y="1819656"/>
+            <a:ext cx="3154680" cy="292608"/>
+          </a:xfrm>
+          <a:prstGeom prst="rect">
+            <a:avLst/>
+          </a:prstGeom>
+          <a:noFill/>
+        </p:spPr>
+        <p:txBody>
+          <a:bodyPr wrap="square">
+            <a:spAutoFit/>
+          </a:bodyPr>
+          <a:lstStyle/>
+          <a:p>
+            <a:pPr algn="l"/>
+            <a:r>
+              <a:rPr sz="1000" b="0" i="0">
+                <a:solidFill>
+                  <a:srgbClr val="FEE440"/>
+                </a:solidFill>
+                <a:latin typeface="Consolas"/>
+              </a:rPr>
+              <a:t>offset += Δθ（每幀遞增）</a:t>
+            </a:r>
+          </a:p>
+        </p:txBody>
+      </p:sp>
+      <p:sp>
+        <p:nvSpPr>
+          <p:cNvPr id="10" name="TextBox 9"/>
+          <p:cNvSpPr txBox="1"/>
+          <p:nvPr/>
+        </p:nvSpPr>
+        <p:spPr>
+          <a:xfrm>
+            <a:off x="548640" y="2048256"/>
+            <a:ext cx="3108960" cy="182880"/>
+          </a:xfrm>
+          <a:prstGeom prst="rect">
+            <a:avLst/>
+          </a:prstGeom>
+          <a:noFill/>
+        </p:spPr>
+        <p:txBody>
+          <a:bodyPr wrap="square">
+            <a:spAutoFit/>
+          </a:bodyPr>
+          <a:lstStyle/>
+          <a:p>
+            <a:pPr algn="l"/>
+            <a:r>
+              <a:rPr sz="800" b="0" i="1">
+                <a:solidFill>
+                  <a:srgbClr val="8B80A8"/>
+                </a:solidFill>
+                <a:latin typeface="Consolas"/>
+              </a:rPr>
+              <a:t>Boss.java:154 / BulletPattern.java:39-40</a:t>
+            </a:r>
+          </a:p>
+        </p:txBody>
+      </p:sp>
+      <p:sp>
+        <p:nvSpPr>
+          <p:cNvPr id="11" name="Rectangle 10"/>
+          <p:cNvSpPr/>
+          <p:nvPr/>
+        </p:nvSpPr>
+        <p:spPr>
+          <a:xfrm>
+            <a:off x="3822191" y="1572768"/>
+            <a:ext cx="16459" cy="603503"/>
+          </a:xfrm>
+          <a:prstGeom prst="rect">
+            <a:avLst/>
+          </a:prstGeom>
+          <a:solidFill>
+            <a:srgbClr val="9B5DE5"/>
+          </a:solidFill>
+          <a:ln>
+            <a:noFill/>
+          </a:ln>
+        </p:spPr>
+        <p:style>
+          <a:lnRef idx="1">
+            <a:schemeClr val="accent1"/>
+          </a:lnRef>
+          <a:fillRef idx="3">
+            <a:schemeClr val="accent1"/>
+          </a:fillRef>
+          <a:effectRef idx="2">
+            <a:schemeClr val="accent1"/>
+          </a:effectRef>
+          <a:fontRef idx="minor">
+            <a:schemeClr val="lt1"/>
+          </a:fontRef>
+        </p:style>
+        <p:txBody>
+          <a:bodyPr rtlCol="0" anchor="ctr"/>
+          <a:lstStyle/>
+          <a:p>
+            <a:pPr algn="ctr"/>
+          </a:p>
+        </p:txBody>
+      </p:sp>
+      <p:sp>
+        <p:nvSpPr>
+          <p:cNvPr id="12" name="TextBox 11"/>
+          <p:cNvSpPr txBox="1"/>
+          <p:nvPr/>
+        </p:nvSpPr>
+        <p:spPr>
+          <a:xfrm>
+            <a:off x="3977639" y="1536192"/>
+            <a:ext cx="4663440" cy="676656"/>
+          </a:xfrm>
+          <a:prstGeom prst="rect">
+            <a:avLst/>
+          </a:prstGeom>
+          <a:noFill/>
+        </p:spPr>
+        <p:txBody>
+          <a:bodyPr wrap="square">
+            <a:spAutoFit/>
+          </a:bodyPr>
+          <a:lstStyle/>
+          <a:p>
+            <a:pPr>
+              <a:lnSpc>
+                <a:spcPct val="100000"/>
+              </a:lnSpc>
+            </a:pPr>
+            <a:r>
+              <a:rPr sz="850">
+                <a:solidFill>
+                  <a:srgbClr val="00F5D4"/>
+                </a:solidFill>
+                <a:latin typeface="Consolas"/>
+              </a:rPr>
+              <a:t>spiralAngle += 0.12;            // 呼叫端每幀</a:t>
+            </a:r>
+          </a:p>
+          <a:p>
+            <a:pPr>
+              <a:lnSpc>
+                <a:spcPct val="100000"/>
+              </a:lnSpc>
+            </a:pPr>
+            <a:r>
+              <a:rPr sz="850">
+                <a:solidFill>
+                  <a:srgbClr val="00F5D4"/>
+                </a:solidFill>
+                <a:latin typeface="Consolas"/>
+              </a:rPr>
+              <a:t>spiralArm(x,y,arms,speed,..,spiralAngle);</a:t>
+            </a:r>
+          </a:p>
+          <a:p>
+            <a:pPr>
+              <a:lnSpc>
+                <a:spcPct val="100000"/>
+              </a:lnSpc>
+            </a:pPr>
+            <a:r>
+              <a:rPr sz="850">
+                <a:solidFill>
+                  <a:srgbClr val="00F5D4"/>
+                </a:solidFill>
+                <a:latin typeface="Consolas"/>
+              </a:rPr>
+              <a:t>// 內部： angle = offsetAngle</a:t>
+            </a:r>
+          </a:p>
+          <a:p>
+            <a:pPr>
+              <a:lnSpc>
+                <a:spcPct val="100000"/>
+              </a:lnSpc>
+            </a:pPr>
+            <a:r>
+              <a:rPr sz="850">
+                <a:solidFill>
+                  <a:srgbClr val="00F5D4"/>
+                </a:solidFill>
+                <a:latin typeface="Consolas"/>
+              </a:rPr>
+              <a:t>//        + i*(2*Math.PI/arms);</a:t>
+            </a:r>
+          </a:p>
+        </p:txBody>
+      </p:sp>
+      <p:sp>
+        <p:nvSpPr>
+          <p:cNvPr id="13" name="Rectangle 12"/>
+          <p:cNvSpPr/>
+          <p:nvPr/>
+        </p:nvSpPr>
+        <p:spPr>
+          <a:xfrm>
+            <a:off x="365760" y="2313432"/>
+            <a:ext cx="8412480" cy="786384"/>
+          </a:xfrm>
+          <a:prstGeom prst="rect">
+            <a:avLst/>
+          </a:prstGeom>
+          <a:solidFill>
+            <a:srgbClr val="1A1230"/>
+          </a:solidFill>
+          <a:ln>
+            <a:noFill/>
+          </a:ln>
+        </p:spPr>
+        <p:style>
+          <a:lnRef idx="1">
+            <a:schemeClr val="accent1"/>
+          </a:lnRef>
+          <a:fillRef idx="3">
+            <a:schemeClr val="accent1"/>
+          </a:fillRef>
+          <a:effectRef idx="2">
+            <a:schemeClr val="accent1"/>
+          </a:effectRef>
+          <a:fontRef idx="minor">
+            <a:schemeClr val="lt1"/>
+          </a:fontRef>
+        </p:style>
+        <p:txBody>
+          <a:bodyPr rtlCol="0" anchor="ctr"/>
+          <a:lstStyle/>
+          <a:p>
+            <a:pPr algn="ctr"/>
+          </a:p>
+        </p:txBody>
+      </p:sp>
+      <p:sp>
+        <p:nvSpPr>
+          <p:cNvPr id="14" name="Oval 13"/>
+          <p:cNvSpPr/>
+          <p:nvPr/>
+        </p:nvSpPr>
+        <p:spPr>
+          <a:xfrm>
+            <a:off x="530352" y="2432304"/>
+            <a:ext cx="146304" cy="146304"/>
+          </a:xfrm>
+          <a:prstGeom prst="ellipse">
+            <a:avLst/>
+          </a:prstGeom>
+          <a:solidFill>
+            <a:srgbClr val="F15BB5"/>
+          </a:solidFill>
+          <a:ln>
+            <a:noFill/>
+          </a:ln>
+        </p:spPr>
+        <p:style>
+          <a:lnRef idx="1">
+            <a:schemeClr val="accent1"/>
+          </a:lnRef>
+          <a:fillRef idx="3">
+            <a:schemeClr val="accent1"/>
+          </a:fillRef>
+          <a:effectRef idx="2">
+            <a:schemeClr val="accent1"/>
+          </a:effectRef>
+          <a:fontRef idx="minor">
+            <a:schemeClr val="lt1"/>
+          </a:fontRef>
+        </p:style>
+        <p:txBody>
+          <a:bodyPr rtlCol="0" anchor="ctr"/>
+          <a:lstStyle/>
+          <a:p>
+            <a:pPr algn="ctr"/>
+          </a:p>
+        </p:txBody>
+      </p:sp>
+      <p:sp>
+        <p:nvSpPr>
+          <p:cNvPr id="15" name="TextBox 14"/>
+          <p:cNvSpPr txBox="1"/>
+          <p:nvPr/>
+        </p:nvSpPr>
+        <p:spPr>
+          <a:xfrm>
+            <a:off x="768096" y="2377440"/>
+            <a:ext cx="2377440" cy="274320"/>
+          </a:xfrm>
+          <a:prstGeom prst="rect">
+            <a:avLst/>
+          </a:prstGeom>
+          <a:noFill/>
+        </p:spPr>
+        <p:txBody>
+          <a:bodyPr wrap="square">
+            <a:spAutoFit/>
+          </a:bodyPr>
+          <a:lstStyle/>
+          <a:p>
+            <a:pPr algn="l"/>
+            <a:r>
+              <a:rPr sz="1300" b="1" i="0">
+                <a:solidFill>
+                  <a:srgbClr val="F0EAF8"/>
+                </a:solidFill>
+                <a:latin typeface="Calibri"/>
+              </a:rPr>
+              <a:t>追蹤彈</a:t>
+            </a:r>
+          </a:p>
+        </p:txBody>
+      </p:sp>
+      <p:sp>
+        <p:nvSpPr>
+          <p:cNvPr id="16" name="TextBox 15"/>
+          <p:cNvSpPr txBox="1"/>
+          <p:nvPr/>
+        </p:nvSpPr>
+        <p:spPr>
+          <a:xfrm>
+            <a:off x="548640" y="2651760"/>
+            <a:ext cx="3154680" cy="292608"/>
+          </a:xfrm>
+          <a:prstGeom prst="rect">
+            <a:avLst/>
+          </a:prstGeom>
+          <a:noFill/>
+        </p:spPr>
+        <p:txBody>
+          <a:bodyPr wrap="square">
+            <a:spAutoFit/>
+          </a:bodyPr>
+          <a:lstStyle/>
+          <a:p>
+            <a:pPr algn="l"/>
+            <a:r>
+              <a:rPr sz="1000" b="0" i="0">
+                <a:solidFill>
+                  <a:srgbClr val="FEE440"/>
+                </a:solidFill>
+                <a:latin typeface="Consolas"/>
+              </a:rPr>
+              <a:t>angle += clamp(target−angle, ±0.05)</a:t>
+            </a:r>
+          </a:p>
+        </p:txBody>
+      </p:sp>
+      <p:sp>
+        <p:nvSpPr>
+          <p:cNvPr id="17" name="TextBox 16"/>
+          <p:cNvSpPr txBox="1"/>
+          <p:nvPr/>
+        </p:nvSpPr>
+        <p:spPr>
+          <a:xfrm>
+            <a:off x="548640" y="2880360"/>
+            <a:ext cx="3108960" cy="182880"/>
+          </a:xfrm>
+          <a:prstGeom prst="rect">
+            <a:avLst/>
+          </a:prstGeom>
+          <a:noFill/>
+        </p:spPr>
+        <p:txBody>
+          <a:bodyPr wrap="square">
+            <a:spAutoFit/>
+          </a:bodyPr>
+          <a:lstStyle/>
+          <a:p>
+            <a:pPr algn="l"/>
+            <a:r>
+              <a:rPr sz="800" b="0" i="1">
+                <a:solidFill>
+                  <a:srgbClr val="8B80A8"/>
+                </a:solidFill>
+                <a:latin typeface="Consolas"/>
+              </a:rPr>
+              <a:t>Bullet.java:61-65</a:t>
+            </a:r>
+          </a:p>
+        </p:txBody>
+      </p:sp>
+      <p:sp>
+        <p:nvSpPr>
+          <p:cNvPr id="18" name="Rectangle 17"/>
+          <p:cNvSpPr/>
+          <p:nvPr/>
+        </p:nvSpPr>
+        <p:spPr>
+          <a:xfrm>
+            <a:off x="3822191" y="2404872"/>
+            <a:ext cx="16459" cy="603503"/>
+          </a:xfrm>
+          <a:prstGeom prst="rect">
+            <a:avLst/>
+          </a:prstGeom>
+          <a:solidFill>
+            <a:srgbClr val="9B5DE5"/>
+          </a:solidFill>
+          <a:ln>
+            <a:noFill/>
+          </a:ln>
+        </p:spPr>
+        <p:style>
+          <a:lnRef idx="1">
+            <a:schemeClr val="accent1"/>
+          </a:lnRef>
+          <a:fillRef idx="3">
+            <a:schemeClr val="accent1"/>
+          </a:fillRef>
+          <a:effectRef idx="2">
+            <a:schemeClr val="accent1"/>
+          </a:effectRef>
+          <a:fontRef idx="minor">
+            <a:schemeClr val="lt1"/>
+          </a:fontRef>
+        </p:style>
+        <p:txBody>
+          <a:bodyPr rtlCol="0" anchor="ctr"/>
+          <a:lstStyle/>
+          <a:p>
+            <a:pPr algn="ctr"/>
+          </a:p>
+        </p:txBody>
+      </p:sp>
+      <p:sp>
+        <p:nvSpPr>
+          <p:cNvPr id="19" name="TextBox 18"/>
+          <p:cNvSpPr txBox="1"/>
+          <p:nvPr/>
+        </p:nvSpPr>
+        <p:spPr>
+          <a:xfrm>
+            <a:off x="3977639" y="2368296"/>
+            <a:ext cx="4663440" cy="676656"/>
+          </a:xfrm>
+          <a:prstGeom prst="rect">
+            <a:avLst/>
+          </a:prstGeom>
+          <a:noFill/>
+        </p:spPr>
+        <p:txBody>
+          <a:bodyPr wrap="square">
+            <a:spAutoFit/>
+          </a:bodyPr>
+          <a:lstStyle/>
+          <a:p>
+            <a:pPr>
+              <a:lnSpc>
+                <a:spcPct val="100000"/>
+              </a:lnSpc>
+            </a:pPr>
+            <a:r>
+              <a:rPr sz="850">
+                <a:solidFill>
+                  <a:srgbClr val="00F5D4"/>
+                </a:solidFill>
+                <a:latin typeface="Consolas"/>
+              </a:rPr>
+              <a:t>double diff = normalizeAngle(</a:t>
+            </a:r>
+          </a:p>
+          <a:p>
+            <a:pPr>
+              <a:lnSpc>
+                <a:spcPct val="100000"/>
+              </a:lnSpc>
+            </a:pPr>
+            <a:r>
+              <a:rPr sz="850">
+                <a:solidFill>
+                  <a:srgbClr val="00F5D4"/>
+                </a:solidFill>
+                <a:latin typeface="Consolas"/>
+              </a:rPr>
+              <a:t>    targetAngle - currentAngle);</a:t>
+            </a:r>
+          </a:p>
+          <a:p>
+            <a:pPr>
+              <a:lnSpc>
+                <a:spcPct val="100000"/>
+              </a:lnSpc>
+            </a:pPr>
+            <a:r>
+              <a:rPr sz="850">
+                <a:solidFill>
+                  <a:srgbClr val="00F5D4"/>
+                </a:solidFill>
+                <a:latin typeface="Consolas"/>
+              </a:rPr>
+              <a:t>currentAngle += Math.max(-0.05,</a:t>
+            </a:r>
+          </a:p>
+          <a:p>
+            <a:pPr>
+              <a:lnSpc>
+                <a:spcPct val="100000"/>
+              </a:lnSpc>
+            </a:pPr>
+            <a:r>
+              <a:rPr sz="850">
+                <a:solidFill>
+                  <a:srgbClr val="00F5D4"/>
+                </a:solidFill>
+                <a:latin typeface="Consolas"/>
+              </a:rPr>
+              <a:t>    Math.min(0.05, diff));   // 夾限轉向</a:t>
+            </a:r>
+          </a:p>
+        </p:txBody>
+      </p:sp>
+      <p:sp>
+        <p:nvSpPr>
+          <p:cNvPr id="20" name="Rectangle 19"/>
+          <p:cNvSpPr/>
+          <p:nvPr/>
+        </p:nvSpPr>
+        <p:spPr>
+          <a:xfrm>
+            <a:off x="365760" y="3145536"/>
+            <a:ext cx="8412480" cy="786384"/>
+          </a:xfrm>
+          <a:prstGeom prst="rect">
+            <a:avLst/>
+          </a:prstGeom>
+          <a:solidFill>
+            <a:srgbClr val="1A1230"/>
+          </a:solidFill>
+          <a:ln>
+            <a:noFill/>
+          </a:ln>
+        </p:spPr>
+        <p:style>
+          <a:lnRef idx="1">
+            <a:schemeClr val="accent1"/>
+          </a:lnRef>
+          <a:fillRef idx="3">
+            <a:schemeClr val="accent1"/>
+          </a:fillRef>
+          <a:effectRef idx="2">
+            <a:schemeClr val="accent1"/>
+          </a:effectRef>
+          <a:fontRef idx="minor">
+            <a:schemeClr val="lt1"/>
+          </a:fontRef>
+        </p:style>
+        <p:txBody>
+          <a:bodyPr rtlCol="0" anchor="ctr"/>
+          <a:lstStyle/>
+          <a:p>
+            <a:pPr algn="ctr"/>
+          </a:p>
+        </p:txBody>
+      </p:sp>
+      <p:sp>
+        <p:nvSpPr>
+          <p:cNvPr id="21" name="Oval 20"/>
+          <p:cNvSpPr/>
+          <p:nvPr/>
+        </p:nvSpPr>
+        <p:spPr>
+          <a:xfrm>
+            <a:off x="530352" y="3264408"/>
+            <a:ext cx="146304" cy="146304"/>
+          </a:xfrm>
+          <a:prstGeom prst="ellipse">
+            <a:avLst/>
+          </a:prstGeom>
+          <a:solidFill>
+            <a:srgbClr val="00F5D4"/>
+          </a:solidFill>
+          <a:ln>
+            <a:noFill/>
+          </a:ln>
+        </p:spPr>
+        <p:style>
+          <a:lnRef idx="1">
+            <a:schemeClr val="accent1"/>
+          </a:lnRef>
+          <a:fillRef idx="3">
+            <a:schemeClr val="accent1"/>
+          </a:fillRef>
+          <a:effectRef idx="2">
+            <a:schemeClr val="accent1"/>
+          </a:effectRef>
+          <a:fontRef idx="minor">
+            <a:schemeClr val="lt1"/>
+          </a:fontRef>
+        </p:style>
+        <p:txBody>
+          <a:bodyPr rtlCol="0" anchor="ctr"/>
+          <a:lstStyle/>
+          <a:p>
+            <a:pPr algn="ctr"/>
+          </a:p>
+        </p:txBody>
+      </p:sp>
+      <p:sp>
+        <p:nvSpPr>
+          <p:cNvPr id="22" name="TextBox 21"/>
+          <p:cNvSpPr txBox="1"/>
+          <p:nvPr/>
+        </p:nvSpPr>
+        <p:spPr>
+          <a:xfrm>
+            <a:off x="768096" y="3209544"/>
+            <a:ext cx="2377440" cy="274320"/>
+          </a:xfrm>
+          <a:prstGeom prst="rect">
+            <a:avLst/>
+          </a:prstGeom>
+          <a:noFill/>
+        </p:spPr>
+        <p:txBody>
+          <a:bodyPr wrap="square">
+            <a:spAutoFit/>
+          </a:bodyPr>
+          <a:lstStyle/>
+          <a:p>
+            <a:pPr algn="l"/>
+            <a:r>
+              <a:rPr sz="1300" b="1" i="0">
+                <a:solidFill>
+                  <a:srgbClr val="F0EAF8"/>
+                </a:solidFill>
+                <a:latin typeface="Calibri"/>
+              </a:rPr>
+              <a:t>波動彈</a:t>
+            </a:r>
+          </a:p>
+        </p:txBody>
+      </p:sp>
+      <p:sp>
+        <p:nvSpPr>
+          <p:cNvPr id="23" name="TextBox 22"/>
+          <p:cNvSpPr txBox="1"/>
+          <p:nvPr/>
+        </p:nvSpPr>
+        <p:spPr>
+          <a:xfrm>
+            <a:off x="548640" y="3483864"/>
+            <a:ext cx="3154680" cy="292608"/>
+          </a:xfrm>
+          <a:prstGeom prst="rect">
+            <a:avLst/>
+          </a:prstGeom>
+          <a:noFill/>
+        </p:spPr>
+        <p:txBody>
+          <a:bodyPr wrap="square">
+            <a:spAutoFit/>
+          </a:bodyPr>
+          <a:lstStyle/>
+          <a:p>
+            <a:pPr algn="l"/>
+            <a:r>
+              <a:rPr sz="1000" b="0" i="0">
+                <a:solidFill>
+                  <a:srgbClr val="FEE440"/>
+                </a:solidFill>
+                <a:latin typeface="Consolas"/>
+              </a:rPr>
+              <a:t>perp = sin(phase)×amp</a:t>
+            </a:r>
+          </a:p>
+        </p:txBody>
+      </p:sp>
+      <p:sp>
+        <p:nvSpPr>
+          <p:cNvPr id="24" name="TextBox 23"/>
+          <p:cNvSpPr txBox="1"/>
+          <p:nvPr/>
+        </p:nvSpPr>
+        <p:spPr>
+          <a:xfrm>
+            <a:off x="548640" y="3712464"/>
+            <a:ext cx="3108960" cy="182880"/>
+          </a:xfrm>
+          <a:prstGeom prst="rect">
+            <a:avLst/>
+          </a:prstGeom>
+          <a:noFill/>
+        </p:spPr>
+        <p:txBody>
+          <a:bodyPr wrap="square">
+            <a:spAutoFit/>
+          </a:bodyPr>
+          <a:lstStyle/>
+          <a:p>
+            <a:pPr algn="l"/>
+            <a:r>
+              <a:rPr sz="800" b="0" i="1">
+                <a:solidFill>
+                  <a:srgbClr val="8B80A8"/>
+                </a:solidFill>
+                <a:latin typeface="Consolas"/>
+              </a:rPr>
+              <a:t>Bullet.java:69-74</a:t>
+            </a:r>
+          </a:p>
+        </p:txBody>
+      </p:sp>
+      <p:sp>
+        <p:nvSpPr>
+          <p:cNvPr id="25" name="Rectangle 24"/>
+          <p:cNvSpPr/>
+          <p:nvPr/>
+        </p:nvSpPr>
+        <p:spPr>
+          <a:xfrm>
+            <a:off x="3822191" y="3236976"/>
+            <a:ext cx="16459" cy="603503"/>
+          </a:xfrm>
+          <a:prstGeom prst="rect">
+            <a:avLst/>
+          </a:prstGeom>
+          <a:solidFill>
+            <a:srgbClr val="9B5DE5"/>
+          </a:solidFill>
+          <a:ln>
+            <a:noFill/>
+          </a:ln>
+        </p:spPr>
+        <p:style>
+          <a:lnRef idx="1">
+            <a:schemeClr val="accent1"/>
+          </a:lnRef>
+          <a:fillRef idx="3">
+            <a:schemeClr val="accent1"/>
+          </a:fillRef>
+          <a:effectRef idx="2">
+            <a:schemeClr val="accent1"/>
+          </a:effectRef>
+          <a:fontRef idx="minor">
+            <a:schemeClr val="lt1"/>
+          </a:fontRef>
+        </p:style>
+        <p:txBody>
+          <a:bodyPr rtlCol="0" anchor="ctr"/>
+          <a:lstStyle/>
+          <a:p>
+            <a:pPr algn="ctr"/>
+          </a:p>
+        </p:txBody>
+      </p:sp>
+      <p:sp>
+        <p:nvSpPr>
+          <p:cNvPr id="26" name="TextBox 25"/>
+          <p:cNvSpPr txBox="1"/>
+          <p:nvPr/>
+        </p:nvSpPr>
+        <p:spPr>
+          <a:xfrm>
+            <a:off x="3977639" y="3200400"/>
+            <a:ext cx="4663440" cy="676656"/>
+          </a:xfrm>
+          <a:prstGeom prst="rect">
+            <a:avLst/>
+          </a:prstGeom>
+          <a:noFill/>
+        </p:spPr>
+        <p:txBody>
+          <a:bodyPr wrap="square">
+            <a:spAutoFit/>
+          </a:bodyPr>
+          <a:lstStyle/>
+          <a:p>
+            <a:pPr>
+              <a:lnSpc>
+                <a:spcPct val="100000"/>
+              </a:lnSpc>
+            </a:pPr>
+            <a:r>
+              <a:rPr sz="850">
+                <a:solidFill>
+                  <a:srgbClr val="00F5D4"/>
+                </a:solidFill>
+                <a:latin typeface="Consolas"/>
+              </a:rPr>
+              <a:t>wavePhase += waveFreq;</a:t>
+            </a:r>
+          </a:p>
+          <a:p>
+            <a:pPr>
+              <a:lnSpc>
+                <a:spcPct val="100000"/>
+              </a:lnSpc>
+            </a:pPr>
+            <a:r>
+              <a:rPr sz="850">
+                <a:solidFill>
+                  <a:srgbClr val="00F5D4"/>
+                </a:solidFill>
+                <a:latin typeface="Consolas"/>
+              </a:rPr>
+              <a:t>double wave = Math.sin(wavePhase)*waveAmp;</a:t>
+            </a:r>
+          </a:p>
+          <a:p>
+            <a:pPr>
+              <a:lnSpc>
+                <a:spcPct val="100000"/>
+              </a:lnSpc>
+            </a:pPr>
+            <a:r>
+              <a:rPr sz="850">
+                <a:solidFill>
+                  <a:srgbClr val="00F5D4"/>
+                </a:solidFill>
+                <a:latin typeface="Consolas"/>
+              </a:rPr>
+              <a:t>x += vx + (-Math.sin(angle))*wave;</a:t>
+            </a:r>
+          </a:p>
+          <a:p>
+            <a:pPr>
+              <a:lnSpc>
+                <a:spcPct val="100000"/>
+              </a:lnSpc>
+            </a:pPr>
+            <a:r>
+              <a:rPr sz="850">
+                <a:solidFill>
+                  <a:srgbClr val="00F5D4"/>
+                </a:solidFill>
+                <a:latin typeface="Consolas"/>
+              </a:rPr>
+              <a:t>y += vy + ( Math.cos(angle))*wave;</a:t>
+            </a:r>
+          </a:p>
+        </p:txBody>
+      </p:sp>
+      <p:sp>
+        <p:nvSpPr>
+          <p:cNvPr id="27" name="Rectangle 26"/>
+          <p:cNvSpPr/>
+          <p:nvPr/>
+        </p:nvSpPr>
+        <p:spPr>
+          <a:xfrm>
+            <a:off x="365760" y="3977639"/>
+            <a:ext cx="8412480" cy="786384"/>
+          </a:xfrm>
+          <a:prstGeom prst="rect">
+            <a:avLst/>
+          </a:prstGeom>
+          <a:solidFill>
+            <a:srgbClr val="1A1230"/>
+          </a:solidFill>
+          <a:ln>
+            <a:noFill/>
+          </a:ln>
+        </p:spPr>
+        <p:style>
+          <a:lnRef idx="1">
+            <a:schemeClr val="accent1"/>
+          </a:lnRef>
+          <a:fillRef idx="3">
+            <a:schemeClr val="accent1"/>
+          </a:fillRef>
+          <a:effectRef idx="2">
+            <a:schemeClr val="accent1"/>
+          </a:effectRef>
+          <a:fontRef idx="minor">
+            <a:schemeClr val="lt1"/>
+          </a:fontRef>
+        </p:style>
+        <p:txBody>
+          <a:bodyPr rtlCol="0" anchor="ctr"/>
+          <a:lstStyle/>
+          <a:p>
+            <a:pPr algn="ctr"/>
+          </a:p>
+        </p:txBody>
+      </p:sp>
+      <p:sp>
+        <p:nvSpPr>
+          <p:cNvPr id="28" name="Oval 27"/>
+          <p:cNvSpPr/>
+          <p:nvPr/>
+        </p:nvSpPr>
+        <p:spPr>
+          <a:xfrm>
+            <a:off x="530352" y="4096511"/>
+            <a:ext cx="146304" cy="146304"/>
+          </a:xfrm>
+          <a:prstGeom prst="ellipse">
+            <a:avLst/>
+          </a:prstGeom>
+          <a:solidFill>
+            <a:srgbClr val="C77DFF"/>
+          </a:solidFill>
+          <a:ln>
+            <a:noFill/>
+          </a:ln>
+        </p:spPr>
+        <p:style>
+          <a:lnRef idx="1">
+            <a:schemeClr val="accent1"/>
+          </a:lnRef>
+          <a:fillRef idx="3">
+            <a:schemeClr val="accent1"/>
+          </a:fillRef>
+          <a:effectRef idx="2">
+            <a:schemeClr val="accent1"/>
+          </a:effectRef>
+          <a:fontRef idx="minor">
+            <a:schemeClr val="lt1"/>
+          </a:fontRef>
+        </p:style>
+        <p:txBody>
+          <a:bodyPr rtlCol="0" anchor="ctr"/>
+          <a:lstStyle/>
+          <a:p>
+            <a:pPr algn="ctr"/>
+          </a:p>
+        </p:txBody>
+      </p:sp>
+      <p:sp>
+        <p:nvSpPr>
+          <p:cNvPr id="29" name="TextBox 28"/>
+          <p:cNvSpPr txBox="1"/>
+          <p:nvPr/>
+        </p:nvSpPr>
+        <p:spPr>
+          <a:xfrm>
+            <a:off x="768096" y="4041648"/>
+            <a:ext cx="2377440" cy="274320"/>
+          </a:xfrm>
+          <a:prstGeom prst="rect">
+            <a:avLst/>
+          </a:prstGeom>
+          <a:noFill/>
+        </p:spPr>
+        <p:txBody>
+          <a:bodyPr wrap="square">
+            <a:spAutoFit/>
+          </a:bodyPr>
+          <a:lstStyle/>
+          <a:p>
+            <a:pPr algn="l"/>
+            <a:r>
+              <a:rPr sz="1300" b="1" i="0">
+                <a:solidFill>
+                  <a:srgbClr val="F0EAF8"/>
+                </a:solidFill>
+                <a:latin typeface="Calibri"/>
+              </a:rPr>
+              <a:t>蝴蝶散射</a:t>
+            </a:r>
+          </a:p>
+        </p:txBody>
+      </p:sp>
+      <p:sp>
+        <p:nvSpPr>
+          <p:cNvPr id="30" name="TextBox 29"/>
+          <p:cNvSpPr txBox="1"/>
+          <p:nvPr/>
+        </p:nvSpPr>
+        <p:spPr>
+          <a:xfrm>
+            <a:off x="548640" y="4315968"/>
+            <a:ext cx="3154680" cy="292608"/>
+          </a:xfrm>
+          <a:prstGeom prst="rect">
+            <a:avLst/>
+          </a:prstGeom>
+          <a:noFill/>
+        </p:spPr>
+        <p:txBody>
+          <a:bodyPr wrap="square">
+            <a:spAutoFit/>
+          </a:bodyPr>
+          <a:lstStyle/>
+          <a:p>
+            <a:pPr algn="l"/>
+            <a:r>
+              <a:rPr sz="1000" b="0" i="0">
+                <a:solidFill>
+                  <a:srgbClr val="FEE440"/>
+                </a:solidFill>
+                <a:latin typeface="Consolas"/>
+              </a:rPr>
+              <a:t>spread = sin(t)×π×0.4</a:t>
+            </a:r>
+          </a:p>
+        </p:txBody>
+      </p:sp>
+      <p:sp>
+        <p:nvSpPr>
+          <p:cNvPr id="31" name="TextBox 30"/>
+          <p:cNvSpPr txBox="1"/>
+          <p:nvPr/>
+        </p:nvSpPr>
+        <p:spPr>
+          <a:xfrm>
+            <a:off x="548640" y="4544568"/>
+            <a:ext cx="3108960" cy="182880"/>
+          </a:xfrm>
+          <a:prstGeom prst="rect">
+            <a:avLst/>
+          </a:prstGeom>
+          <a:noFill/>
+        </p:spPr>
+        <p:txBody>
+          <a:bodyPr wrap="square">
+            <a:spAutoFit/>
+          </a:bodyPr>
+          <a:lstStyle/>
+          <a:p>
+            <a:pPr algn="l"/>
+            <a:r>
+              <a:rPr sz="800" b="0" i="1">
+                <a:solidFill>
+                  <a:srgbClr val="8B80A8"/>
+                </a:solidFill>
+                <a:latin typeface="Consolas"/>
+              </a:rPr>
+              <a:t>BulletPattern.java:147-149</a:t>
+            </a:r>
+          </a:p>
+        </p:txBody>
+      </p:sp>
+      <p:sp>
+        <p:nvSpPr>
+          <p:cNvPr id="32" name="Rectangle 31"/>
+          <p:cNvSpPr/>
+          <p:nvPr/>
+        </p:nvSpPr>
+        <p:spPr>
+          <a:xfrm>
+            <a:off x="3822191" y="4069079"/>
+            <a:ext cx="16459" cy="603503"/>
+          </a:xfrm>
+          <a:prstGeom prst="rect">
+            <a:avLst/>
+          </a:prstGeom>
+          <a:solidFill>
+            <a:srgbClr val="9B5DE5"/>
+          </a:solidFill>
+          <a:ln>
+            <a:noFill/>
+          </a:ln>
+        </p:spPr>
+        <p:style>
+          <a:lnRef idx="1">
+            <a:schemeClr val="accent1"/>
+          </a:lnRef>
+          <a:fillRef idx="3">
+            <a:schemeClr val="accent1"/>
+          </a:fillRef>
+          <a:effectRef idx="2">
+            <a:schemeClr val="accent1"/>
+          </a:effectRef>
+          <a:fontRef idx="minor">
+            <a:schemeClr val="lt1"/>
+          </a:fontRef>
+        </p:style>
+        <p:txBody>
+          <a:bodyPr rtlCol="0" anchor="ctr"/>
+          <a:lstStyle/>
+          <a:p>
+            <a:pPr algn="ctr"/>
+          </a:p>
+        </p:txBody>
+      </p:sp>
+      <p:sp>
+        <p:nvSpPr>
+          <p:cNvPr id="33" name="TextBox 32"/>
+          <p:cNvSpPr txBox="1"/>
+          <p:nvPr/>
+        </p:nvSpPr>
+        <p:spPr>
+          <a:xfrm>
+            <a:off x="3977639" y="4032503"/>
+            <a:ext cx="4663440" cy="676656"/>
+          </a:xfrm>
+          <a:prstGeom prst="rect">
+            <a:avLst/>
+          </a:prstGeom>
+          <a:noFill/>
+        </p:spPr>
+        <p:txBody>
+          <a:bodyPr wrap="square">
+            <a:spAutoFit/>
+          </a:bodyPr>
+          <a:lstStyle/>
+          <a:p>
+            <a:pPr>
+              <a:lnSpc>
+                <a:spcPct val="100000"/>
+              </a:lnSpc>
+            </a:pPr>
+            <a:r>
+              <a:rPr sz="850">
+                <a:solidFill>
+                  <a:srgbClr val="00F5D4"/>
+                </a:solidFill>
+                <a:latin typeface="Consolas"/>
+              </a:rPr>
+              <a:t>double t = timeOffset + i*0.3;</a:t>
+            </a:r>
+          </a:p>
+          <a:p>
+            <a:pPr>
+              <a:lnSpc>
+                <a:spcPct val="100000"/>
+              </a:lnSpc>
+            </a:pPr>
+            <a:r>
+              <a:rPr sz="850">
+                <a:solidFill>
+                  <a:srgbClr val="00F5D4"/>
+                </a:solidFill>
+                <a:latin typeface="Consolas"/>
+              </a:rPr>
+              <a:t>double sp = Math.sin(t)*Math.PI*0.4;</a:t>
+            </a:r>
+          </a:p>
+          <a:p>
+            <a:pPr>
+              <a:lnSpc>
+                <a:spcPct val="100000"/>
+              </a:lnSpc>
+            </a:pPr>
+            <a:r>
+              <a:rPr sz="850">
+                <a:solidFill>
+                  <a:srgbClr val="00F5D4"/>
+                </a:solidFill>
+                <a:latin typeface="Consolas"/>
+              </a:rPr>
+              <a:t>double angle = baseAngle + sp;</a:t>
+            </a:r>
+          </a:p>
+        </p:txBody>
+      </p:sp>
+      <p:sp>
+        <p:nvSpPr>
+          <p:cNvPr id="34" name="TextBox 33"/>
+          <p:cNvSpPr txBox="1"/>
+          <p:nvPr/>
+        </p:nvSpPr>
+        <p:spPr>
+          <a:xfrm>
+            <a:off x="365760" y="4828031"/>
+            <a:ext cx="8412480" cy="237744"/>
+          </a:xfrm>
+          <a:prstGeom prst="rect">
+            <a:avLst/>
+          </a:prstGeom>
+          <a:noFill/>
+        </p:spPr>
+        <p:txBody>
+          <a:bodyPr wrap="square">
+            <a:spAutoFit/>
+          </a:bodyPr>
+          <a:lstStyle/>
+          <a:p>
+            <a:pPr algn="l"/>
+            <a:r>
+              <a:rPr sz="900" b="0" i="1">
+                <a:solidFill>
+                  <a:srgbClr val="8B80A8"/>
+                </a:solidFill>
+                <a:latin typeface="Calibri"/>
+              </a:rPr>
+              <a:t>＊螺旋臂的旋轉來自呼叫端每幀對 spiralAngle 累加；追蹤彈每幀僅修正 ±0.05 rad。</a:t>
+            </a:r>
+          </a:p>
+        </p:txBody>
+      </p:sp>
+    </p:spTree>
+  </p:cSld>
+  <p:clrMapOvr>
+    <a:masterClrMapping/>
+  </p:clrMapOvr>
+</p:sld>
+</file>
+
+<file path=ppt/slides/slide13.xml><?xml version="1.0" encoding="utf-8"?>
+<p:sld xmlns:a="http://schemas.openxmlformats.org/drawingml/2006/main" xmlns:p="http://schemas.openxmlformats.org/presentationml/2006/main" xmlns:r="http://schemas.openxmlformats.org/officeDocument/2006/relationships">
+  <p:cSld>
+    <p:bg>
+      <p:bgPr>
+        <a:solidFill>
+          <a:srgbClr val="0F0A1E"/>
+        </a:solidFill>
+        <a:effectLst/>
+      </p:bgPr>
+    </p:bg>
+    <p:spTree>
+      <p:nvGrpSpPr>
+        <p:cNvPr id="1" name=""/>
+        <p:cNvGrpSpPr/>
+        <p:nvPr/>
+      </p:nvGrpSpPr>
+      <p:grpSpPr/>
+      <p:sp>
+        <p:nvSpPr>
+          <p:cNvPr id="2" name="Rectangle 1"/>
+          <p:cNvSpPr/>
+          <p:nvPr/>
+        </p:nvSpPr>
+        <p:spPr>
+          <a:xfrm>
+            <a:off x="365760" y="137160"/>
+            <a:ext cx="2743200" cy="347472"/>
+          </a:xfrm>
+          <a:prstGeom prst="rect">
+            <a:avLst/>
+          </a:prstGeom>
+          <a:solidFill>
+            <a:srgbClr val="9B5DE5"/>
+          </a:solidFill>
+          <a:ln>
+            <a:noFill/>
+          </a:ln>
+        </p:spPr>
+        <p:style>
+          <a:lnRef idx="1">
+            <a:schemeClr val="accent1"/>
+          </a:lnRef>
+          <a:fillRef idx="3">
+            <a:schemeClr val="accent1"/>
+          </a:fillRef>
+          <a:effectRef idx="2">
+            <a:schemeClr val="accent1"/>
+          </a:effectRef>
+          <a:fontRef idx="minor">
+            <a:schemeClr val="lt1"/>
+          </a:fontRef>
+        </p:style>
+        <p:txBody>
+          <a:bodyPr rtlCol="0" anchor="ctr"/>
+          <a:lstStyle/>
+          <a:p>
+            <a:pPr algn="ctr"/>
+          </a:p>
+        </p:txBody>
+      </p:sp>
+      <p:sp>
+        <p:nvSpPr>
+          <p:cNvPr id="3" name="TextBox 2"/>
+          <p:cNvSpPr txBox="1"/>
+          <p:nvPr/>
+        </p:nvSpPr>
+        <p:spPr>
+          <a:xfrm>
+            <a:off x="365760" y="137160"/>
+            <a:ext cx="2743200" cy="347472"/>
+          </a:xfrm>
+          <a:prstGeom prst="rect">
+            <a:avLst/>
+          </a:prstGeom>
+          <a:noFill/>
+        </p:spPr>
+        <p:txBody>
+          <a:bodyPr wrap="square">
+            <a:spAutoFit/>
+          </a:bodyPr>
+          <a:lstStyle/>
+          <a:p>
+            <a:pPr algn="ctr"/>
+            <a:r>
+              <a:rPr sz="1100" b="1" i="0">
+                <a:solidFill>
+                  <a:srgbClr val="F0EAF8"/>
+                </a:solidFill>
+                <a:latin typeface="Calibri"/>
+              </a:rPr>
+              <a:t>03  Technologies Used</a:t>
+            </a:r>
+          </a:p>
+        </p:txBody>
+      </p:sp>
+      <p:sp>
+        <p:nvSpPr>
+          <p:cNvPr id="4" name="TextBox 3"/>
+          <p:cNvSpPr txBox="1"/>
+          <p:nvPr/>
+        </p:nvSpPr>
+        <p:spPr>
+          <a:xfrm>
+            <a:off x="365760" y="566928"/>
+            <a:ext cx="8412480" cy="658368"/>
+          </a:xfrm>
+          <a:prstGeom prst="rect">
+            <a:avLst/>
+          </a:prstGeom>
+          <a:noFill/>
+        </p:spPr>
+        <p:txBody>
+          <a:bodyPr wrap="square">
+            <a:spAutoFit/>
+          </a:bodyPr>
+          <a:lstStyle/>
+          <a:p>
+            <a:pPr algn="l"/>
+            <a:r>
+              <a:rPr sz="2600" b="1" i="0">
+                <a:solidFill>
+                  <a:srgbClr val="F0EAF8"/>
+                </a:solidFill>
+                <a:latin typeface="Calibri"/>
+              </a:rPr>
+              <a:t>數學公式 ↔ 對應程式碼</a:t>
+            </a:r>
+          </a:p>
+        </p:txBody>
+      </p:sp>
+      <p:sp>
+        <p:nvSpPr>
+          <p:cNvPr id="5" name="TextBox 4"/>
+          <p:cNvSpPr txBox="1"/>
+          <p:nvPr/>
+        </p:nvSpPr>
+        <p:spPr>
+          <a:xfrm>
+            <a:off x="365760" y="1133856"/>
+            <a:ext cx="8412480" cy="274320"/>
+          </a:xfrm>
+          <a:prstGeom prst="rect">
+            <a:avLst/>
+          </a:prstGeom>
+          <a:noFill/>
+        </p:spPr>
+        <p:txBody>
+          <a:bodyPr wrap="square">
+            <a:spAutoFit/>
+          </a:bodyPr>
+          <a:lstStyle/>
+          <a:p>
+            <a:pPr algn="l"/>
+            <a:r>
+              <a:rPr sz="1250" b="0" i="0">
+                <a:solidFill>
+                  <a:srgbClr val="C77DFF"/>
+                </a:solidFill>
+                <a:latin typeface="Calibri"/>
+              </a:rPr>
+              <a:t>子彈運動模式 type 0–3　·　Bullet.update() 的物理積分</a:t>
+            </a:r>
+          </a:p>
+        </p:txBody>
+      </p:sp>
+      <p:sp>
+        <p:nvSpPr>
+          <p:cNvPr id="6" name="Rectangle 5"/>
+          <p:cNvSpPr/>
+          <p:nvPr/>
+        </p:nvSpPr>
+        <p:spPr>
+          <a:xfrm>
+            <a:off x="365760" y="1481328"/>
+            <a:ext cx="8412480" cy="786384"/>
+          </a:xfrm>
+          <a:prstGeom prst="rect">
+            <a:avLst/>
+          </a:prstGeom>
+          <a:solidFill>
+            <a:srgbClr val="1A1230"/>
+          </a:solidFill>
+          <a:ln>
+            <a:noFill/>
+          </a:ln>
+        </p:spPr>
+        <p:style>
+          <a:lnRef idx="1">
+            <a:schemeClr val="accent1"/>
+          </a:lnRef>
+          <a:fillRef idx="3">
+            <a:schemeClr val="accent1"/>
+          </a:fillRef>
+          <a:effectRef idx="2">
+            <a:schemeClr val="accent1"/>
+          </a:effectRef>
+          <a:fontRef idx="minor">
+            <a:schemeClr val="lt1"/>
+          </a:fontRef>
+        </p:style>
+        <p:txBody>
+          <a:bodyPr rtlCol="0" anchor="ctr"/>
+          <a:lstStyle/>
+          <a:p>
+            <a:pPr algn="ctr"/>
+          </a:p>
+        </p:txBody>
+      </p:sp>
+      <p:sp>
+        <p:nvSpPr>
+          <p:cNvPr id="7" name="Oval 6"/>
+          <p:cNvSpPr/>
+          <p:nvPr/>
+        </p:nvSpPr>
+        <p:spPr>
+          <a:xfrm>
+            <a:off x="530352" y="1600200"/>
+            <a:ext cx="146304" cy="146304"/>
+          </a:xfrm>
+          <a:prstGeom prst="ellipse">
+            <a:avLst/>
+          </a:prstGeom>
+          <a:solidFill>
+            <a:srgbClr val="F0EAF8"/>
+          </a:solidFill>
+          <a:ln>
+            <a:noFill/>
+          </a:ln>
+        </p:spPr>
+        <p:style>
+          <a:lnRef idx="1">
+            <a:schemeClr val="accent1"/>
+          </a:lnRef>
+          <a:fillRef idx="3">
+            <a:schemeClr val="accent1"/>
+          </a:fillRef>
+          <a:effectRef idx="2">
+            <a:schemeClr val="accent1"/>
+          </a:effectRef>
+          <a:fontRef idx="minor">
+            <a:schemeClr val="lt1"/>
+          </a:fontRef>
+        </p:style>
+        <p:txBody>
+          <a:bodyPr rtlCol="0" anchor="ctr"/>
+          <a:lstStyle/>
+          <a:p>
+            <a:pPr algn="ctr"/>
+          </a:p>
+        </p:txBody>
+      </p:sp>
+      <p:sp>
+        <p:nvSpPr>
+          <p:cNvPr id="8" name="TextBox 7"/>
+          <p:cNvSpPr txBox="1"/>
+          <p:nvPr/>
+        </p:nvSpPr>
+        <p:spPr>
+          <a:xfrm>
+            <a:off x="768096" y="1545336"/>
+            <a:ext cx="2377440" cy="274320"/>
+          </a:xfrm>
+          <a:prstGeom prst="rect">
+            <a:avLst/>
+          </a:prstGeom>
+          <a:noFill/>
+        </p:spPr>
+        <p:txBody>
+          <a:bodyPr wrap="square">
+            <a:spAutoFit/>
+          </a:bodyPr>
+          <a:lstStyle/>
+          <a:p>
+            <a:pPr algn="l"/>
+            <a:r>
+              <a:rPr sz="1300" b="1" i="0">
+                <a:solidFill>
+                  <a:srgbClr val="F0EAF8"/>
+                </a:solidFill>
+                <a:latin typeface="Calibri"/>
+              </a:rPr>
+              <a:t>type 0 直線</a:t>
+            </a:r>
+          </a:p>
+        </p:txBody>
+      </p:sp>
+      <p:sp>
+        <p:nvSpPr>
+          <p:cNvPr id="9" name="TextBox 8"/>
+          <p:cNvSpPr txBox="1"/>
+          <p:nvPr/>
+        </p:nvSpPr>
+        <p:spPr>
+          <a:xfrm>
+            <a:off x="548640" y="1819656"/>
+            <a:ext cx="3154680" cy="292608"/>
+          </a:xfrm>
+          <a:prstGeom prst="rect">
+            <a:avLst/>
+          </a:prstGeom>
+          <a:noFill/>
+        </p:spPr>
+        <p:txBody>
+          <a:bodyPr wrap="square">
+            <a:spAutoFit/>
+          </a:bodyPr>
+          <a:lstStyle/>
+          <a:p>
+            <a:pPr algn="l"/>
+            <a:r>
+              <a:rPr sz="1000" b="0" i="0">
+                <a:solidFill>
+                  <a:srgbClr val="FEE440"/>
+                </a:solidFill>
+                <a:latin typeface="Consolas"/>
+              </a:rPr>
+              <a:t>x += vx ; y += vy</a:t>
+            </a:r>
+          </a:p>
+        </p:txBody>
+      </p:sp>
+      <p:sp>
+        <p:nvSpPr>
+          <p:cNvPr id="10" name="TextBox 9"/>
+          <p:cNvSpPr txBox="1"/>
+          <p:nvPr/>
+        </p:nvSpPr>
+        <p:spPr>
+          <a:xfrm>
+            <a:off x="548640" y="2048256"/>
+            <a:ext cx="3108960" cy="182880"/>
+          </a:xfrm>
+          <a:prstGeom prst="rect">
+            <a:avLst/>
+          </a:prstGeom>
+          <a:noFill/>
+        </p:spPr>
+        <p:txBody>
+          <a:bodyPr wrap="square">
+            <a:spAutoFit/>
+          </a:bodyPr>
+          <a:lstStyle/>
+          <a:p>
+            <a:pPr algn="l"/>
+            <a:r>
+              <a:rPr sz="800" b="0" i="1">
+                <a:solidFill>
+                  <a:srgbClr val="8B80A8"/>
+                </a:solidFill>
+                <a:latin typeface="Consolas"/>
+              </a:rPr>
+              <a:t>Bullet.java:89-90</a:t>
+            </a:r>
+          </a:p>
+        </p:txBody>
+      </p:sp>
+      <p:sp>
+        <p:nvSpPr>
+          <p:cNvPr id="11" name="Rectangle 10"/>
+          <p:cNvSpPr/>
+          <p:nvPr/>
+        </p:nvSpPr>
+        <p:spPr>
+          <a:xfrm>
+            <a:off x="3822191" y="1572768"/>
+            <a:ext cx="16459" cy="603503"/>
+          </a:xfrm>
+          <a:prstGeom prst="rect">
+            <a:avLst/>
+          </a:prstGeom>
+          <a:solidFill>
+            <a:srgbClr val="9B5DE5"/>
+          </a:solidFill>
+          <a:ln>
+            <a:noFill/>
+          </a:ln>
+        </p:spPr>
+        <p:style>
+          <a:lnRef idx="1">
+            <a:schemeClr val="accent1"/>
+          </a:lnRef>
+          <a:fillRef idx="3">
+            <a:schemeClr val="accent1"/>
+          </a:fillRef>
+          <a:effectRef idx="2">
+            <a:schemeClr val="accent1"/>
+          </a:effectRef>
+          <a:fontRef idx="minor">
+            <a:schemeClr val="lt1"/>
+          </a:fontRef>
+        </p:style>
+        <p:txBody>
+          <a:bodyPr rtlCol="0" anchor="ctr"/>
+          <a:lstStyle/>
+          <a:p>
+            <a:pPr algn="ctr"/>
+          </a:p>
+        </p:txBody>
+      </p:sp>
+      <p:sp>
+        <p:nvSpPr>
+          <p:cNvPr id="12" name="TextBox 11"/>
+          <p:cNvSpPr txBox="1"/>
+          <p:nvPr/>
+        </p:nvSpPr>
+        <p:spPr>
+          <a:xfrm>
+            <a:off x="3977639" y="1536192"/>
+            <a:ext cx="4663440" cy="676656"/>
+          </a:xfrm>
+          <a:prstGeom prst="rect">
+            <a:avLst/>
+          </a:prstGeom>
+          <a:noFill/>
+        </p:spPr>
+        <p:txBody>
+          <a:bodyPr wrap="square">
+            <a:spAutoFit/>
+          </a:bodyPr>
+          <a:lstStyle/>
+          <a:p>
+            <a:pPr>
+              <a:lnSpc>
+                <a:spcPct val="100000"/>
+              </a:lnSpc>
+            </a:pPr>
+            <a:r>
+              <a:rPr sz="850">
+                <a:solidFill>
+                  <a:srgbClr val="00F5D4"/>
+                </a:solidFill>
+                <a:latin typeface="Consolas"/>
+              </a:rPr>
+              <a:t>// default：等速直線（可選角速度）</a:t>
+            </a:r>
+          </a:p>
+          <a:p>
+            <a:pPr>
+              <a:lnSpc>
+                <a:spcPct val="100000"/>
+              </a:lnSpc>
+            </a:pPr>
+            <a:r>
+              <a:rPr sz="850">
+                <a:solidFill>
+                  <a:srgbClr val="00F5D4"/>
+                </a:solidFill>
+                <a:latin typeface="Consolas"/>
+              </a:rPr>
+              <a:t>x += vx;</a:t>
+            </a:r>
+          </a:p>
+          <a:p>
+            <a:pPr>
+              <a:lnSpc>
+                <a:spcPct val="100000"/>
+              </a:lnSpc>
+            </a:pPr>
+            <a:r>
+              <a:rPr sz="850">
+                <a:solidFill>
+                  <a:srgbClr val="00F5D4"/>
+                </a:solidFill>
+                <a:latin typeface="Consolas"/>
+              </a:rPr>
+              <a:t>y += vy;</a:t>
+            </a:r>
+          </a:p>
+        </p:txBody>
+      </p:sp>
+      <p:sp>
+        <p:nvSpPr>
+          <p:cNvPr id="13" name="Rectangle 12"/>
+          <p:cNvSpPr/>
+          <p:nvPr/>
+        </p:nvSpPr>
+        <p:spPr>
+          <a:xfrm>
+            <a:off x="365760" y="2313432"/>
+            <a:ext cx="8412480" cy="786384"/>
+          </a:xfrm>
+          <a:prstGeom prst="rect">
+            <a:avLst/>
+          </a:prstGeom>
+          <a:solidFill>
+            <a:srgbClr val="1A1230"/>
+          </a:solidFill>
+          <a:ln>
+            <a:noFill/>
+          </a:ln>
+        </p:spPr>
+        <p:style>
+          <a:lnRef idx="1">
+            <a:schemeClr val="accent1"/>
+          </a:lnRef>
+          <a:fillRef idx="3">
+            <a:schemeClr val="accent1"/>
+          </a:fillRef>
+          <a:effectRef idx="2">
+            <a:schemeClr val="accent1"/>
+          </a:effectRef>
+          <a:fontRef idx="minor">
+            <a:schemeClr val="lt1"/>
+          </a:fontRef>
+        </p:style>
+        <p:txBody>
+          <a:bodyPr rtlCol="0" anchor="ctr"/>
+          <a:lstStyle/>
+          <a:p>
+            <a:pPr algn="ctr"/>
+          </a:p>
+        </p:txBody>
+      </p:sp>
+      <p:sp>
+        <p:nvSpPr>
+          <p:cNvPr id="14" name="Oval 13"/>
+          <p:cNvSpPr/>
+          <p:nvPr/>
+        </p:nvSpPr>
+        <p:spPr>
+          <a:xfrm>
+            <a:off x="530352" y="2432304"/>
+            <a:ext cx="146304" cy="146304"/>
+          </a:xfrm>
+          <a:prstGeom prst="ellipse">
+            <a:avLst/>
+          </a:prstGeom>
+          <a:solidFill>
+            <a:srgbClr val="F15BB5"/>
+          </a:solidFill>
+          <a:ln>
+            <a:noFill/>
+          </a:ln>
+        </p:spPr>
+        <p:style>
+          <a:lnRef idx="1">
+            <a:schemeClr val="accent1"/>
+          </a:lnRef>
+          <a:fillRef idx="3">
+            <a:schemeClr val="accent1"/>
+          </a:fillRef>
+          <a:effectRef idx="2">
+            <a:schemeClr val="accent1"/>
+          </a:effectRef>
+          <a:fontRef idx="minor">
+            <a:schemeClr val="lt1"/>
+          </a:fontRef>
+        </p:style>
+        <p:txBody>
+          <a:bodyPr rtlCol="0" anchor="ctr"/>
+          <a:lstStyle/>
+          <a:p>
+            <a:pPr algn="ctr"/>
+          </a:p>
+        </p:txBody>
+      </p:sp>
+      <p:sp>
+        <p:nvSpPr>
+          <p:cNvPr id="15" name="TextBox 14"/>
+          <p:cNvSpPr txBox="1"/>
+          <p:nvPr/>
+        </p:nvSpPr>
+        <p:spPr>
+          <a:xfrm>
+            <a:off x="768096" y="2377440"/>
+            <a:ext cx="2377440" cy="274320"/>
+          </a:xfrm>
+          <a:prstGeom prst="rect">
+            <a:avLst/>
+          </a:prstGeom>
+          <a:noFill/>
+        </p:spPr>
+        <p:txBody>
+          <a:bodyPr wrap="square">
+            <a:spAutoFit/>
+          </a:bodyPr>
+          <a:lstStyle/>
+          <a:p>
+            <a:pPr algn="l"/>
+            <a:r>
+              <a:rPr sz="1300" b="1" i="0">
+                <a:solidFill>
+                  <a:srgbClr val="F0EAF8"/>
+                </a:solidFill>
+                <a:latin typeface="Calibri"/>
+              </a:rPr>
+              <a:t>type 1 追蹤</a:t>
+            </a:r>
+          </a:p>
+        </p:txBody>
+      </p:sp>
+      <p:sp>
+        <p:nvSpPr>
+          <p:cNvPr id="16" name="TextBox 15"/>
+          <p:cNvSpPr txBox="1"/>
+          <p:nvPr/>
+        </p:nvSpPr>
+        <p:spPr>
+          <a:xfrm>
+            <a:off x="548640" y="2651760"/>
+            <a:ext cx="3154680" cy="292608"/>
+          </a:xfrm>
+          <a:prstGeom prst="rect">
+            <a:avLst/>
+          </a:prstGeom>
+          <a:noFill/>
+        </p:spPr>
+        <p:txBody>
+          <a:bodyPr wrap="square">
+            <a:spAutoFit/>
+          </a:bodyPr>
+          <a:lstStyle/>
+          <a:p>
+            <a:pPr algn="l"/>
+            <a:r>
+              <a:rPr sz="1000" b="0" i="0">
+                <a:solidFill>
+                  <a:srgbClr val="FEE440"/>
+                </a:solidFill>
+                <a:latin typeface="Consolas"/>
+              </a:rPr>
+              <a:t>clamp(Δangle, ±0.05) 後重算 v</a:t>
+            </a:r>
+          </a:p>
+        </p:txBody>
+      </p:sp>
+      <p:sp>
+        <p:nvSpPr>
+          <p:cNvPr id="17" name="TextBox 16"/>
+          <p:cNvSpPr txBox="1"/>
+          <p:nvPr/>
+        </p:nvSpPr>
+        <p:spPr>
+          <a:xfrm>
+            <a:off x="548640" y="2880360"/>
+            <a:ext cx="3108960" cy="182880"/>
+          </a:xfrm>
+          <a:prstGeom prst="rect">
+            <a:avLst/>
+          </a:prstGeom>
+          <a:noFill/>
+        </p:spPr>
+        <p:txBody>
+          <a:bodyPr wrap="square">
+            <a:spAutoFit/>
+          </a:bodyPr>
+          <a:lstStyle/>
+          <a:p>
+            <a:pPr algn="l"/>
+            <a:r>
+              <a:rPr sz="800" b="0" i="1">
+                <a:solidFill>
+                  <a:srgbClr val="8B80A8"/>
+                </a:solidFill>
+                <a:latin typeface="Consolas"/>
+              </a:rPr>
+              <a:t>Bullet.java:63-65</a:t>
+            </a:r>
+          </a:p>
+        </p:txBody>
+      </p:sp>
+      <p:sp>
+        <p:nvSpPr>
+          <p:cNvPr id="18" name="Rectangle 17"/>
+          <p:cNvSpPr/>
+          <p:nvPr/>
+        </p:nvSpPr>
+        <p:spPr>
+          <a:xfrm>
+            <a:off x="3822191" y="2404872"/>
+            <a:ext cx="16459" cy="603503"/>
+          </a:xfrm>
+          <a:prstGeom prst="rect">
+            <a:avLst/>
+          </a:prstGeom>
+          <a:solidFill>
+            <a:srgbClr val="9B5DE5"/>
+          </a:solidFill>
+          <a:ln>
+            <a:noFill/>
+          </a:ln>
+        </p:spPr>
+        <p:style>
+          <a:lnRef idx="1">
+            <a:schemeClr val="accent1"/>
+          </a:lnRef>
+          <a:fillRef idx="3">
+            <a:schemeClr val="accent1"/>
+          </a:fillRef>
+          <a:effectRef idx="2">
+            <a:schemeClr val="accent1"/>
+          </a:effectRef>
+          <a:fontRef idx="minor">
+            <a:schemeClr val="lt1"/>
+          </a:fontRef>
+        </p:style>
+        <p:txBody>
+          <a:bodyPr rtlCol="0" anchor="ctr"/>
+          <a:lstStyle/>
+          <a:p>
+            <a:pPr algn="ctr"/>
+          </a:p>
+        </p:txBody>
+      </p:sp>
+      <p:sp>
+        <p:nvSpPr>
+          <p:cNvPr id="19" name="TextBox 18"/>
+          <p:cNvSpPr txBox="1"/>
+          <p:nvPr/>
+        </p:nvSpPr>
+        <p:spPr>
+          <a:xfrm>
+            <a:off x="3977639" y="2368296"/>
+            <a:ext cx="4663440" cy="676656"/>
+          </a:xfrm>
+          <a:prstGeom prst="rect">
+            <a:avLst/>
+          </a:prstGeom>
+          <a:noFill/>
+        </p:spPr>
+        <p:txBody>
+          <a:bodyPr wrap="square">
+            <a:spAutoFit/>
+          </a:bodyPr>
+          <a:lstStyle/>
+          <a:p>
+            <a:pPr>
+              <a:lnSpc>
+                <a:spcPct val="100000"/>
+              </a:lnSpc>
+            </a:pPr>
+            <a:r>
+              <a:rPr sz="850">
+                <a:solidFill>
+                  <a:srgbClr val="00F5D4"/>
+                </a:solidFill>
+                <a:latin typeface="Consolas"/>
+              </a:rPr>
+              <a:t>currentAngle += Math.max(-0.05,</a:t>
+            </a:r>
+          </a:p>
+          <a:p>
+            <a:pPr>
+              <a:lnSpc>
+                <a:spcPct val="100000"/>
+              </a:lnSpc>
+            </a:pPr>
+            <a:r>
+              <a:rPr sz="850">
+                <a:solidFill>
+                  <a:srgbClr val="00F5D4"/>
+                </a:solidFill>
+                <a:latin typeface="Consolas"/>
+              </a:rPr>
+              <a:t>    Math.min(0.05, diff));</a:t>
+            </a:r>
+          </a:p>
+          <a:p>
+            <a:pPr>
+              <a:lnSpc>
+                <a:spcPct val="100000"/>
+              </a:lnSpc>
+            </a:pPr>
+            <a:r>
+              <a:rPr sz="850">
+                <a:solidFill>
+                  <a:srgbClr val="00F5D4"/>
+                </a:solidFill>
+                <a:latin typeface="Consolas"/>
+              </a:rPr>
+              <a:t>vx = Math.cos(currentAngle)*speed;</a:t>
+            </a:r>
+          </a:p>
+          <a:p>
+            <a:pPr>
+              <a:lnSpc>
+                <a:spcPct val="100000"/>
+              </a:lnSpc>
+            </a:pPr>
+            <a:r>
+              <a:rPr sz="850">
+                <a:solidFill>
+                  <a:srgbClr val="00F5D4"/>
+                </a:solidFill>
+                <a:latin typeface="Consolas"/>
+              </a:rPr>
+              <a:t>vy = Math.sin(currentAngle)*speed;</a:t>
+            </a:r>
+          </a:p>
+        </p:txBody>
+      </p:sp>
+      <p:sp>
+        <p:nvSpPr>
+          <p:cNvPr id="20" name="Rectangle 19"/>
+          <p:cNvSpPr/>
+          <p:nvPr/>
+        </p:nvSpPr>
+        <p:spPr>
+          <a:xfrm>
+            <a:off x="365760" y="3145536"/>
+            <a:ext cx="8412480" cy="786384"/>
+          </a:xfrm>
+          <a:prstGeom prst="rect">
+            <a:avLst/>
+          </a:prstGeom>
+          <a:solidFill>
+            <a:srgbClr val="1A1230"/>
+          </a:solidFill>
+          <a:ln>
+            <a:noFill/>
+          </a:ln>
+        </p:spPr>
+        <p:style>
+          <a:lnRef idx="1">
+            <a:schemeClr val="accent1"/>
+          </a:lnRef>
+          <a:fillRef idx="3">
+            <a:schemeClr val="accent1"/>
+          </a:fillRef>
+          <a:effectRef idx="2">
+            <a:schemeClr val="accent1"/>
+          </a:effectRef>
+          <a:fontRef idx="minor">
+            <a:schemeClr val="lt1"/>
+          </a:fontRef>
+        </p:style>
+        <p:txBody>
+          <a:bodyPr rtlCol="0" anchor="ctr"/>
+          <a:lstStyle/>
+          <a:p>
+            <a:pPr algn="ctr"/>
+          </a:p>
+        </p:txBody>
+      </p:sp>
+      <p:sp>
+        <p:nvSpPr>
+          <p:cNvPr id="21" name="Oval 20"/>
+          <p:cNvSpPr/>
+          <p:nvPr/>
+        </p:nvSpPr>
+        <p:spPr>
+          <a:xfrm>
+            <a:off x="530352" y="3264408"/>
+            <a:ext cx="146304" cy="146304"/>
+          </a:xfrm>
+          <a:prstGeom prst="ellipse">
+            <a:avLst/>
+          </a:prstGeom>
+          <a:solidFill>
+            <a:srgbClr val="00F5D4"/>
+          </a:solidFill>
+          <a:ln>
+            <a:noFill/>
+          </a:ln>
+        </p:spPr>
+        <p:style>
+          <a:lnRef idx="1">
+            <a:schemeClr val="accent1"/>
+          </a:lnRef>
+          <a:fillRef idx="3">
+            <a:schemeClr val="accent1"/>
+          </a:fillRef>
+          <a:effectRef idx="2">
+            <a:schemeClr val="accent1"/>
+          </a:effectRef>
+          <a:fontRef idx="minor">
+            <a:schemeClr val="lt1"/>
+          </a:fontRef>
+        </p:style>
+        <p:txBody>
+          <a:bodyPr rtlCol="0" anchor="ctr"/>
+          <a:lstStyle/>
+          <a:p>
+            <a:pPr algn="ctr"/>
+          </a:p>
+        </p:txBody>
+      </p:sp>
+      <p:sp>
+        <p:nvSpPr>
+          <p:cNvPr id="22" name="TextBox 21"/>
+          <p:cNvSpPr txBox="1"/>
+          <p:nvPr/>
+        </p:nvSpPr>
+        <p:spPr>
+          <a:xfrm>
+            <a:off x="768096" y="3209544"/>
+            <a:ext cx="2377440" cy="274320"/>
+          </a:xfrm>
+          <a:prstGeom prst="rect">
+            <a:avLst/>
+          </a:prstGeom>
+          <a:noFill/>
+        </p:spPr>
+        <p:txBody>
+          <a:bodyPr wrap="square">
+            <a:spAutoFit/>
+          </a:bodyPr>
+          <a:lstStyle/>
+          <a:p>
+            <a:pPr algn="l"/>
+            <a:r>
+              <a:rPr sz="1300" b="1" i="0">
+                <a:solidFill>
+                  <a:srgbClr val="F0EAF8"/>
+                </a:solidFill>
+                <a:latin typeface="Calibri"/>
+              </a:rPr>
+              <a:t>type 2 波動</a:t>
+            </a:r>
+          </a:p>
+        </p:txBody>
+      </p:sp>
+      <p:sp>
+        <p:nvSpPr>
+          <p:cNvPr id="23" name="TextBox 22"/>
+          <p:cNvSpPr txBox="1"/>
+          <p:nvPr/>
+        </p:nvSpPr>
+        <p:spPr>
+          <a:xfrm>
+            <a:off x="548640" y="3483864"/>
+            <a:ext cx="3154680" cy="292608"/>
+          </a:xfrm>
+          <a:prstGeom prst="rect">
+            <a:avLst/>
+          </a:prstGeom>
+          <a:noFill/>
+        </p:spPr>
+        <p:txBody>
+          <a:bodyPr wrap="square">
+            <a:spAutoFit/>
+          </a:bodyPr>
+          <a:lstStyle/>
+          <a:p>
+            <a:pPr algn="l"/>
+            <a:r>
+              <a:rPr sz="1000" b="0" i="0">
+                <a:solidFill>
+                  <a:srgbClr val="FEE440"/>
+                </a:solidFill>
+                <a:latin typeface="Consolas"/>
+              </a:rPr>
+              <a:t>phase += freq；正弦側移</a:t>
+            </a:r>
+          </a:p>
+        </p:txBody>
+      </p:sp>
+      <p:sp>
+        <p:nvSpPr>
+          <p:cNvPr id="24" name="TextBox 23"/>
+          <p:cNvSpPr txBox="1"/>
+          <p:nvPr/>
+        </p:nvSpPr>
+        <p:spPr>
+          <a:xfrm>
+            <a:off x="548640" y="3712464"/>
+            <a:ext cx="3108960" cy="182880"/>
+          </a:xfrm>
+          <a:prstGeom prst="rect">
+            <a:avLst/>
+          </a:prstGeom>
+          <a:noFill/>
+        </p:spPr>
+        <p:txBody>
+          <a:bodyPr wrap="square">
+            <a:spAutoFit/>
+          </a:bodyPr>
+          <a:lstStyle/>
+          <a:p>
+            <a:pPr algn="l"/>
+            <a:r>
+              <a:rPr sz="800" b="0" i="1">
+                <a:solidFill>
+                  <a:srgbClr val="8B80A8"/>
+                </a:solidFill>
+                <a:latin typeface="Consolas"/>
+              </a:rPr>
+              <a:t>Bullet.java:69-74</a:t>
+            </a:r>
+          </a:p>
+        </p:txBody>
+      </p:sp>
+      <p:sp>
+        <p:nvSpPr>
+          <p:cNvPr id="25" name="Rectangle 24"/>
+          <p:cNvSpPr/>
+          <p:nvPr/>
+        </p:nvSpPr>
+        <p:spPr>
+          <a:xfrm>
+            <a:off x="3822191" y="3236976"/>
+            <a:ext cx="16459" cy="603503"/>
+          </a:xfrm>
+          <a:prstGeom prst="rect">
+            <a:avLst/>
+          </a:prstGeom>
+          <a:solidFill>
+            <a:srgbClr val="9B5DE5"/>
+          </a:solidFill>
+          <a:ln>
+            <a:noFill/>
+          </a:ln>
+        </p:spPr>
+        <p:style>
+          <a:lnRef idx="1">
+            <a:schemeClr val="accent1"/>
+          </a:lnRef>
+          <a:fillRef idx="3">
+            <a:schemeClr val="accent1"/>
+          </a:fillRef>
+          <a:effectRef idx="2">
+            <a:schemeClr val="accent1"/>
+          </a:effectRef>
+          <a:fontRef idx="minor">
+            <a:schemeClr val="lt1"/>
+          </a:fontRef>
+        </p:style>
+        <p:txBody>
+          <a:bodyPr rtlCol="0" anchor="ctr"/>
+          <a:lstStyle/>
+          <a:p>
+            <a:pPr algn="ctr"/>
+          </a:p>
+        </p:txBody>
+      </p:sp>
+      <p:sp>
+        <p:nvSpPr>
+          <p:cNvPr id="26" name="TextBox 25"/>
+          <p:cNvSpPr txBox="1"/>
+          <p:nvPr/>
+        </p:nvSpPr>
+        <p:spPr>
+          <a:xfrm>
+            <a:off x="3977639" y="3200400"/>
+            <a:ext cx="4663440" cy="676656"/>
+          </a:xfrm>
+          <a:prstGeom prst="rect">
+            <a:avLst/>
+          </a:prstGeom>
+          <a:noFill/>
+        </p:spPr>
+        <p:txBody>
+          <a:bodyPr wrap="square">
+            <a:spAutoFit/>
+          </a:bodyPr>
+          <a:lstStyle/>
+          <a:p>
+            <a:pPr>
+              <a:lnSpc>
+                <a:spcPct val="100000"/>
+              </a:lnSpc>
+            </a:pPr>
+            <a:r>
+              <a:rPr sz="850">
+                <a:solidFill>
+                  <a:srgbClr val="00F5D4"/>
+                </a:solidFill>
+                <a:latin typeface="Consolas"/>
+              </a:rPr>
+              <a:t>wavePhase += waveFreq;</a:t>
+            </a:r>
+          </a:p>
+          <a:p>
+            <a:pPr>
+              <a:lnSpc>
+                <a:spcPct val="100000"/>
+              </a:lnSpc>
+            </a:pPr>
+            <a:r>
+              <a:rPr sz="850">
+                <a:solidFill>
+                  <a:srgbClr val="00F5D4"/>
+                </a:solidFill>
+                <a:latin typeface="Consolas"/>
+              </a:rPr>
+              <a:t>double wave = Math.sin(wavePhase)*waveAmp;</a:t>
+            </a:r>
+          </a:p>
+          <a:p>
+            <a:pPr>
+              <a:lnSpc>
+                <a:spcPct val="100000"/>
+              </a:lnSpc>
+            </a:pPr>
+            <a:r>
+              <a:rPr sz="850">
+                <a:solidFill>
+                  <a:srgbClr val="00F5D4"/>
+                </a:solidFill>
+                <a:latin typeface="Consolas"/>
+              </a:rPr>
+              <a:t>x += vx + perpX*wave;</a:t>
+            </a:r>
+          </a:p>
+          <a:p>
+            <a:pPr>
+              <a:lnSpc>
+                <a:spcPct val="100000"/>
+              </a:lnSpc>
+            </a:pPr>
+            <a:r>
+              <a:rPr sz="850">
+                <a:solidFill>
+                  <a:srgbClr val="00F5D4"/>
+                </a:solidFill>
+                <a:latin typeface="Consolas"/>
+              </a:rPr>
+              <a:t>y += vy + perpY*wave;</a:t>
+            </a:r>
+          </a:p>
+        </p:txBody>
+      </p:sp>
+      <p:sp>
+        <p:nvSpPr>
+          <p:cNvPr id="27" name="Rectangle 26"/>
+          <p:cNvSpPr/>
+          <p:nvPr/>
+        </p:nvSpPr>
+        <p:spPr>
+          <a:xfrm>
+            <a:off x="365760" y="3977639"/>
+            <a:ext cx="8412480" cy="786384"/>
+          </a:xfrm>
+          <a:prstGeom prst="rect">
+            <a:avLst/>
+          </a:prstGeom>
+          <a:solidFill>
+            <a:srgbClr val="1A1230"/>
+          </a:solidFill>
+          <a:ln>
+            <a:noFill/>
+          </a:ln>
+        </p:spPr>
+        <p:style>
+          <a:lnRef idx="1">
+            <a:schemeClr val="accent1"/>
+          </a:lnRef>
+          <a:fillRef idx="3">
+            <a:schemeClr val="accent1"/>
+          </a:fillRef>
+          <a:effectRef idx="2">
+            <a:schemeClr val="accent1"/>
+          </a:effectRef>
+          <a:fontRef idx="minor">
+            <a:schemeClr val="lt1"/>
+          </a:fontRef>
+        </p:style>
+        <p:txBody>
+          <a:bodyPr rtlCol="0" anchor="ctr"/>
+          <a:lstStyle/>
+          <a:p>
+            <a:pPr algn="ctr"/>
+          </a:p>
+        </p:txBody>
+      </p:sp>
+      <p:sp>
+        <p:nvSpPr>
+          <p:cNvPr id="28" name="Oval 27"/>
+          <p:cNvSpPr/>
+          <p:nvPr/>
+        </p:nvSpPr>
+        <p:spPr>
+          <a:xfrm>
+            <a:off x="530352" y="4096511"/>
+            <a:ext cx="146304" cy="146304"/>
+          </a:xfrm>
+          <a:prstGeom prst="ellipse">
+            <a:avLst/>
+          </a:prstGeom>
+          <a:solidFill>
+            <a:srgbClr val="FEE440"/>
+          </a:solidFill>
+          <a:ln>
+            <a:noFill/>
+          </a:ln>
+        </p:spPr>
+        <p:style>
+          <a:lnRef idx="1">
+            <a:schemeClr val="accent1"/>
+          </a:lnRef>
+          <a:fillRef idx="3">
+            <a:schemeClr val="accent1"/>
+          </a:fillRef>
+          <a:effectRef idx="2">
+            <a:schemeClr val="accent1"/>
+          </a:effectRef>
+          <a:fontRef idx="minor">
+            <a:schemeClr val="lt1"/>
+          </a:fontRef>
+        </p:style>
+        <p:txBody>
+          <a:bodyPr rtlCol="0" anchor="ctr"/>
+          <a:lstStyle/>
+          <a:p>
+            <a:pPr algn="ctr"/>
+          </a:p>
+        </p:txBody>
+      </p:sp>
+      <p:sp>
+        <p:nvSpPr>
+          <p:cNvPr id="29" name="TextBox 28"/>
+          <p:cNvSpPr txBox="1"/>
+          <p:nvPr/>
+        </p:nvSpPr>
+        <p:spPr>
+          <a:xfrm>
+            <a:off x="768096" y="4041648"/>
+            <a:ext cx="2377440" cy="274320"/>
+          </a:xfrm>
+          <a:prstGeom prst="rect">
+            <a:avLst/>
+          </a:prstGeom>
+          <a:noFill/>
+        </p:spPr>
+        <p:txBody>
+          <a:bodyPr wrap="square">
+            <a:spAutoFit/>
+          </a:bodyPr>
+          <a:lstStyle/>
+          <a:p>
+            <a:pPr algn="l"/>
+            <a:r>
+              <a:rPr sz="1300" b="1" i="0">
+                <a:solidFill>
+                  <a:srgbClr val="F0EAF8"/>
+                </a:solidFill>
+                <a:latin typeface="Calibri"/>
+              </a:rPr>
+              <a:t>type 3 加速</a:t>
+            </a:r>
+          </a:p>
+        </p:txBody>
+      </p:sp>
+      <p:sp>
+        <p:nvSpPr>
+          <p:cNvPr id="30" name="TextBox 29"/>
+          <p:cNvSpPr txBox="1"/>
+          <p:nvPr/>
+        </p:nvSpPr>
+        <p:spPr>
+          <a:xfrm>
+            <a:off x="548640" y="4315968"/>
+            <a:ext cx="3154680" cy="292608"/>
+          </a:xfrm>
+          <a:prstGeom prst="rect">
+            <a:avLst/>
+          </a:prstGeom>
+          <a:noFill/>
+        </p:spPr>
+        <p:txBody>
+          <a:bodyPr wrap="square">
+            <a:spAutoFit/>
+          </a:bodyPr>
+          <a:lstStyle/>
+          <a:p>
+            <a:pPr algn="l"/>
+            <a:r>
+              <a:rPr sz="1000" b="0" i="0">
+                <a:solidFill>
+                  <a:srgbClr val="FEE440"/>
+                </a:solidFill>
+                <a:latin typeface="Consolas"/>
+              </a:rPr>
+              <a:t>speed += accel（可負）</a:t>
+            </a:r>
+          </a:p>
+        </p:txBody>
+      </p:sp>
+      <p:sp>
+        <p:nvSpPr>
+          <p:cNvPr id="31" name="TextBox 30"/>
+          <p:cNvSpPr txBox="1"/>
+          <p:nvPr/>
+        </p:nvSpPr>
+        <p:spPr>
+          <a:xfrm>
+            <a:off x="548640" y="4544568"/>
+            <a:ext cx="3108960" cy="182880"/>
+          </a:xfrm>
+          <a:prstGeom prst="rect">
+            <a:avLst/>
+          </a:prstGeom>
+          <a:noFill/>
+        </p:spPr>
+        <p:txBody>
+          <a:bodyPr wrap="square">
+            <a:spAutoFit/>
+          </a:bodyPr>
+          <a:lstStyle/>
+          <a:p>
+            <a:pPr algn="l"/>
+            <a:r>
+              <a:rPr sz="800" b="0" i="1">
+                <a:solidFill>
+                  <a:srgbClr val="8B80A8"/>
+                </a:solidFill>
+                <a:latin typeface="Consolas"/>
+              </a:rPr>
+              <a:t>Bullet.java:77-79</a:t>
+            </a:r>
+          </a:p>
+        </p:txBody>
+      </p:sp>
+      <p:sp>
+        <p:nvSpPr>
+          <p:cNvPr id="32" name="Rectangle 31"/>
+          <p:cNvSpPr/>
+          <p:nvPr/>
+        </p:nvSpPr>
+        <p:spPr>
+          <a:xfrm>
+            <a:off x="3822191" y="4069079"/>
+            <a:ext cx="16459" cy="603503"/>
+          </a:xfrm>
+          <a:prstGeom prst="rect">
+            <a:avLst/>
+          </a:prstGeom>
+          <a:solidFill>
+            <a:srgbClr val="9B5DE5"/>
+          </a:solidFill>
+          <a:ln>
+            <a:noFill/>
+          </a:ln>
+        </p:spPr>
+        <p:style>
+          <a:lnRef idx="1">
+            <a:schemeClr val="accent1"/>
+          </a:lnRef>
+          <a:fillRef idx="3">
+            <a:schemeClr val="accent1"/>
+          </a:fillRef>
+          <a:effectRef idx="2">
+            <a:schemeClr val="accent1"/>
+          </a:effectRef>
+          <a:fontRef idx="minor">
+            <a:schemeClr val="lt1"/>
+          </a:fontRef>
+        </p:style>
+        <p:txBody>
+          <a:bodyPr rtlCol="0" anchor="ctr"/>
+          <a:lstStyle/>
+          <a:p>
+            <a:pPr algn="ctr"/>
+          </a:p>
+        </p:txBody>
+      </p:sp>
+      <p:sp>
+        <p:nvSpPr>
+          <p:cNvPr id="33" name="TextBox 32"/>
+          <p:cNvSpPr txBox="1"/>
+          <p:nvPr/>
+        </p:nvSpPr>
+        <p:spPr>
+          <a:xfrm>
+            <a:off x="3977639" y="4032503"/>
+            <a:ext cx="4663440" cy="676656"/>
+          </a:xfrm>
+          <a:prstGeom prst="rect">
+            <a:avLst/>
+          </a:prstGeom>
+          <a:noFill/>
+        </p:spPr>
+        <p:txBody>
+          <a:bodyPr wrap="square">
+            <a:spAutoFit/>
+          </a:bodyPr>
+          <a:lstStyle/>
+          <a:p>
+            <a:pPr>
+              <a:lnSpc>
+                <a:spcPct val="100000"/>
+              </a:lnSpc>
+            </a:pPr>
+            <a:r>
+              <a:rPr sz="850">
+                <a:solidFill>
+                  <a:srgbClr val="00F5D4"/>
+                </a:solidFill>
+                <a:latin typeface="Consolas"/>
+              </a:rPr>
+              <a:t>speed += accel;            // accel&lt;0 即減速</a:t>
+            </a:r>
+          </a:p>
+          <a:p>
+            <a:pPr>
+              <a:lnSpc>
+                <a:spcPct val="100000"/>
+              </a:lnSpc>
+            </a:pPr>
+            <a:r>
+              <a:rPr sz="850">
+                <a:solidFill>
+                  <a:srgbClr val="00F5D4"/>
+                </a:solidFill>
+                <a:latin typeface="Consolas"/>
+              </a:rPr>
+              <a:t>vx = Math.cos(angle)*speed;</a:t>
+            </a:r>
+          </a:p>
+          <a:p>
+            <a:pPr>
+              <a:lnSpc>
+                <a:spcPct val="100000"/>
+              </a:lnSpc>
+            </a:pPr>
+            <a:r>
+              <a:rPr sz="850">
+                <a:solidFill>
+                  <a:srgbClr val="00F5D4"/>
+                </a:solidFill>
+                <a:latin typeface="Consolas"/>
+              </a:rPr>
+              <a:t>vy = Math.sin(angle)*speed;</a:t>
+            </a:r>
+          </a:p>
+        </p:txBody>
+      </p:sp>
+      <p:sp>
+        <p:nvSpPr>
+          <p:cNvPr id="34" name="TextBox 33"/>
+          <p:cNvSpPr txBox="1"/>
+          <p:nvPr/>
+        </p:nvSpPr>
+        <p:spPr>
+          <a:xfrm>
+            <a:off x="365760" y="4828031"/>
+            <a:ext cx="8412480" cy="237744"/>
+          </a:xfrm>
+          <a:prstGeom prst="rect">
+            <a:avLst/>
+          </a:prstGeom>
+          <a:noFill/>
+        </p:spPr>
+        <p:txBody>
+          <a:bodyPr wrap="square">
+            <a:spAutoFit/>
+          </a:bodyPr>
+          <a:lstStyle/>
+          <a:p>
+            <a:pPr algn="l"/>
+            <a:r>
+              <a:rPr sz="900" b="0" i="1">
+                <a:solidFill>
+                  <a:srgbClr val="8B80A8"/>
+                </a:solidFill>
+                <a:latin typeface="Calibri"/>
+              </a:rPr>
+              <a:t>＊type 0–2 於遊戲即時運作；type 3（加速）已實作、目前保留作擴充。</a:t>
             </a:r>
           </a:p>
         </p:txBody>
@@ -16874,7 +21308,7 @@
         <p:spPr>
           <a:xfrm>
             <a:off x="0" y="4160520"/>
-            <a:ext cx="8412480" cy="553998"/>
+            <a:ext cx="8412480" cy="868680"/>
           </a:xfrm>
           <a:prstGeom prst="rect">
             <a:avLst/>
@@ -16889,58 +21323,13 @@
           <a:p>
             <a:pPr algn="l"/>
             <a:r>
-              <a:rPr sz="1000" i="1" dirty="0" err="1">
+              <a:rPr sz="1000" i="1">
                 <a:solidFill>
                   <a:srgbClr val="8B80A8"/>
                 </a:solidFill>
                 <a:latin typeface="Calibri"/>
               </a:rPr>
-              <a:t>難度公式</a:t>
-            </a:r>
-            <a:r>
-              <a:rPr sz="1000" i="1" dirty="0">
-                <a:solidFill>
-                  <a:srgbClr val="8B80A8"/>
-                </a:solidFill>
-                <a:latin typeface="Calibri"/>
-              </a:rPr>
-              <a:t>　</a:t>
-            </a:r>
-            <a:r>
-              <a:rPr sz="1000" i="1" dirty="0" err="1">
-                <a:solidFill>
-                  <a:srgbClr val="8B80A8"/>
-                </a:solidFill>
-                <a:latin typeface="Calibri"/>
-              </a:rPr>
-              <a:t>一般敵人</a:t>
-            </a:r>
-            <a:r>
-              <a:rPr sz="1000" i="1" dirty="0">
-                <a:solidFill>
-                  <a:srgbClr val="8B80A8"/>
-                </a:solidFill>
-                <a:latin typeface="Calibri"/>
-              </a:rPr>
-              <a:t>　</a:t>
-            </a:r>
-            <a:r>
-              <a:rPr sz="1000" i="1" dirty="0" err="1">
-                <a:solidFill>
-                  <a:srgbClr val="8B80A8"/>
-                </a:solidFill>
-                <a:latin typeface="Calibri"/>
-              </a:rPr>
-              <a:t>speedMult</a:t>
-            </a:r>
-            <a:r>
-              <a:rPr sz="1000" i="1" dirty="0">
-                <a:solidFill>
-                  <a:srgbClr val="8B80A8"/>
-                </a:solidFill>
-                <a:latin typeface="Calibri"/>
-              </a:rPr>
-              <a:t> = (1.0 + diff×0.2)×0.65 </a:t>
+              <a:t>難度公式　一般敵人　speedMult = (1.0 + diff×0.2)×0.65 → Easy 0.65 / Normal 0.78 / Hard 0.91 / Lunatic 1.04</a:t>
             </a:r>
             <a:endParaRPr lang="en-US" sz="1000" i="1" dirty="0">
               <a:solidFill>
@@ -16950,44 +21339,14 @@
             </a:endParaRPr>
           </a:p>
           <a:p>
-            <a:pPr algn="l"/>
-            <a:r>
-              <a:rPr sz="1000" i="1" dirty="0">
-                <a:solidFill>
-                  <a:srgbClr val="8B80A8"/>
+            <a:r>
+              <a:rPr sz="1000" i="1">
+                <a:solidFill>
+                  <a:srgbClr val="FEE440"/>
                 </a:solidFill>
                 <a:latin typeface="Calibri"/>
               </a:rPr>
-              <a:t>→ Easy 0.65 / Normal 0.78 / Hard 0.91 / Lunatic 1.04</a:t>
-            </a:r>
-          </a:p>
-          <a:p>
-            <a:r>
-              <a:rPr sz="1000" i="1" dirty="0">
-                <a:solidFill>
-                  <a:srgbClr val="FEE440"/>
-                </a:solidFill>
-                <a:latin typeface="Calibri"/>
-              </a:rPr>
-              <a:t>　　　　　　Boss　　</a:t>
-            </a:r>
-            <a:r>
-              <a:rPr sz="1000" i="1" dirty="0" err="1">
-                <a:solidFill>
-                  <a:srgbClr val="FEE440"/>
-                </a:solidFill>
-                <a:latin typeface="Calibri"/>
-              </a:rPr>
-              <a:t>speedMult</a:t>
-            </a:r>
-            <a:r>
-              <a:rPr sz="1000" i="1" dirty="0">
-                <a:solidFill>
-                  <a:srgbClr val="FEE440"/>
-                </a:solidFill>
-                <a:latin typeface="Calibri"/>
-              </a:rPr>
-              <a:t> = (1.0 + diff×0.25)×0.65 → 0.65 / 0.81 / 0.97 / 1.14</a:t>
+              <a:t>　　　　　　Boss　　speedMult = (1.0 + diff×0.25)×0.65 → 0.65 / 0.81 / 0.97 / 1.14</a:t>
             </a:r>
           </a:p>
         </p:txBody>
